--- a/Curriculo/Fase2_Basico1/decks/Basico1_S05_Kiran.pptx
+++ b/Curriculo/Fase2_Basico1/decks/Basico1_S05_Kiran.pptx
@@ -132,7 +132,7 @@
   <p:extLst>
     <p:ext uri="{521415D9-36F7-43E2-AB2F-B90AF26B5E84}">
       <p14:sectionLst xmlns:p14="http://schemas.microsoft.com/office/powerpoint/2010/main">
-        <p14:section name="Semana 5" id="{6B894758-DE62-B4CD-27DA-DB442CB60406}">
+        <p14:section name="Semana 5" id="{AEA43AF2-ED43-3733-1303-DC6C3E99ADF6}">
           <p14:sldIdLst>
             <p14:sldId id="256"/>
             <p14:sldId id="257"/>
@@ -196,7 +196,7 @@
     </p:spTree>
     <p:extLst>
       <p:ext uri="{BB962C8B-B14F-4D97-AF65-F5344CB8AC3E}">
-        <p14:creationId xmlns:p14="http://schemas.microsoft.com/office/powerpoint/2010/main" val="2121089543"/>
+        <p14:creationId xmlns:p14="http://schemas.microsoft.com/office/powerpoint/2010/main" val="3890591662"/>
       </p:ext>
     </p:extLst>
   </p:cSld>
@@ -1055,7 +1055,7 @@
             <a:r>
               <a:rPr lang="en-US" dirty="0"/>
               <a:t>20:25–20:28 (3 min). Cuenta que desde 2014 la dirección oficial usa el nombre de la calle (도로명 주소), pero para juntarse mucha gente usa la estación de metro y su número de salida. Lee el letrero: 3번 출구 ('번 es número; el 3 se lee 삼번'). Di las frases ancla despacio; 3번 출구에서 만나요 es solo para reconocer. A 2–3 voluntarios: 동네에 지하철역이 있어요? → 네, 있어요 / 아니요, 없어요 · 지하철역이 어디예요? → 우리 집 앞에 있어요. Si vas atrasada: 1 minuto, solo el letrero y 화장실이 어디예요? — 3번 출구 옆에 있어요.
-Imagen sugerida: Letrero D5: cartel genérico de salida de metro con el número 3 y la palabra 출구, y otro con 화장실 (ilustración o foto propia, sin logos de operadores)
+Imagen: incluida (dibujo de la casa).
 Fuente: Nueva
 Lámina 15</a:t>
             </a:r>
@@ -1323,7 +1323,7 @@
             <a:r>
               <a:rPr lang="en-US" dirty="0"/>
               <a:t>20:01–20:05 (4 min). Dicta los ítems 1–3 dos veces cada uno: 이십칠 … 팔십사 … 칠, 공, 육, 삼; los ítems 4 y 5 están en pantalla. Cuenta regresiva y revela la clave (1 min): 'El error clásico es el 4: 네 명, no 사 명. Para contar personas usamos los nativos.' Formato esperado: 1) 27 2) 84 3) 7063 4) b 5) b; anota el puntaje (0–5) en la hoja del curso después de clase (sirve para armar las parejas).
-Imagen sugerida: Dibujo de 4 personas (familia) para el ítem 4; casilleros vacíos para los ítems 1–3
+Imagen: incluida (dibujo de la casa).
 Fuente: Nueva
 Lámina 2</a:t>
             </a:r>
@@ -1947,7 +1947,7 @@
             <a:r>
               <a:rPr lang="en-US" dirty="0"/>
               <a:t>Respaldo para alumnos rápidos o si sobran 3–5 minutos. Cada uno describe su dibujo sin mostrarlo; revela las diferencias con clic al final. Alternativa de emergencia: esconde un objeto y que adivinen con 가방 안에 있어요? — 아니요, 없어요! (máximo 10 preguntas).
-Imagen sugerida: Dibujos D6 lado a lado: dos versiones de D3 con 3 cambios (celular encima/debajo del libro; gato detrás/delante de la silla; lentes dentro del bolso / al lado del computador)
+Imagen: incluida (dibujo de la casa).
 Fuente: Nueva
 Lámina 22</a:t>
             </a:r>
@@ -2037,7 +2037,7 @@
             <a:r>
               <a:rPr lang="en-US" dirty="0"/>
               <a:t>20:05–20:08 (3 min). Señalando Corea: 여기 한국이에요. 서울이에요. Pregunta 집이 어디예요?, responde con tu ciudad (선생님 집은… ___예요/이에요) y pon un sello. Explica en español: literalmente '¿la casa dónde es?'; se responde con la ciudad + 예요/이에요 según el 받침 (con país: 칠레 산티아고예요). Cadena por la lista de Zoom: cada uno responde y le pregunta al siguiente por su nombre; con más de 10 alumnos, la otra mitad escribe su ciudad en el chat.
-Imagen sugerida: Mapa D1: América (de México a Chile) + EE.UU. + España + Corea, sin nombres de países, para sellos de anotación de Zoom; burbujas 산티아고예요. y 서울이에요.
+Imagen: incluida (dibujo de la casa).
 Fuente: Nueva
 Lámina 3</a:t>
             </a:r>
@@ -2394,7 +2394,7 @@
             <a:r>
               <a:rPr lang="en-US" dirty="0"/>
               <a:t>Señala tu escritorio: 여기; la cámara (el lado de ellos): 거기; lejos, la ventana: 저기. 'Es la misma familia que 이거, 그거, 저거: 이 → 여기, 그 → 거기, 저 → 저기.' Corrige la ㅓ de 어디, 저기, 거기 con la boca abierta y relajada: 다시 한번. 어-디.
-Imagen sugerida: Diagrama de 3 distancias (el de 이거 · 그거 · 저거 del deck S3) reusado para 여기 · 거기 · 저기
+Imagen: incluida (dibujo de la casa).
 Fuente: Deck S3 de esta cohorte (diagrama de 이거 · 그거 · 저거)
 Lámina 6</a:t>
             </a:r>
@@ -2484,7 +2484,7 @@
             <a:r>
               <a:rPr lang="en-US" dirty="0"/>
               <a:t>20:11–20:13 (2 min). Cámara al escritorio (esta lámina es el respaldo). Describe dos veces, despacio, señalando: 선생님 책상이에요. 컴퓨터가 책상 위에 있어요. 커피가 컴퓨터 옆에 있어요. 휴대폰이 책 위에 있어요. 가방이 책상 아래에 있어요. 우산은… 없어요! (우산은 lleva 은 a propósito; no lo expliques.) Pregunta y el grupo responde 네! / 아니요! en coro: 'No les pido que lo digan todavía: solo que lo entiendan.'
-Imagen sugerida: Dibujo D3: computador encima del escritorio; taza al lado del computador; celular encima de un libro; bolso debajo del escritorio con lentes asomando adentro; silla delante del escritorio; gato detrás de la silla; ningún paraguas
+Imagen: incluida (dibujo de la casa).
 Fuente: Nueva
 Lámina 7</a:t>
             </a:r>
@@ -2574,7 +2574,7 @@
             <a:r>
               <a:rPr lang="en-US" dirty="0"/>
               <a:t>20:13–20:16 (con la 9). Gestos: mano izquierda plana = escritorio, puño derecho = la cosa: 위 encima, 아래 debajo, 앞 entre la mano y la cámara, 뒤 detrás de la mano, 옆 al lado, 안 un dedo dentro de la mano en tazón. 따라 하세요: 위! 아래! 앞! 뒤! 옆! 안! (gesto + palabra, dos veces); después dices solo la palabra, en desorden, y ellos hacen el gesto. Par mínimo: 앞에 [아페] / 안에 [아네]; 위 / 뒤: la ㄷ de 뒤 suave.
-Imagen sugerida: Viñetas D4: gato sobre, debajo y al lado de un escritorio (vista de lado); gato dentro de un bolso; gato delante y detrás de una casa (vista de mapa, puerta hacia la calle) + iconos de manos
+Imagen: incluida (dibujo de la casa).
 Fuente: A1_Nivel_1/06_Ubicacion/Sesion_06_Ubicacion.pptx lám. 8 (sin 밑, 밖, 사이 ni 의)
 Lámina 8</a:t>
             </a:r>
@@ -3808,7 +3808,7 @@
         <p:spPr>
           <a:xfrm>
             <a:off x="548640" y="1325880"/>
-            <a:ext cx="11064240" cy="457200"/>
+            <a:ext cx="11091672" cy="457200"/>
           </a:xfrm>
           <a:prstGeom prst="rect">
             <a:avLst/>
@@ -3857,7 +3857,7 @@
           <p:nvPr>
             <p:extLst>
               <p:ext uri="{D42A27DB-BD31-4B8C-83A1-F6EECF244321}">
-                <p14:modId xmlns:p14="http://schemas.microsoft.com/office/powerpoint/2010/main" val="655374360"/>
+                <p14:modId xmlns:p14="http://schemas.microsoft.com/office/powerpoint/2010/main" val="726321474"/>
               </p:ext>
             </p:extLst>
           </p:nvPr>
@@ -5130,7 +5130,7 @@
         <p:spPr>
           <a:xfrm>
             <a:off x="548640" y="1325880"/>
-            <a:ext cx="11064240" cy="457200"/>
+            <a:ext cx="11091672" cy="457200"/>
           </a:xfrm>
           <a:prstGeom prst="rect">
             <a:avLst/>
@@ -5730,7 +5730,7 @@
         <p:spPr>
           <a:xfrm>
             <a:off x="548640" y="1325880"/>
-            <a:ext cx="11064240" cy="457200"/>
+            <a:ext cx="11091672" cy="457200"/>
           </a:xfrm>
           <a:prstGeom prst="rect">
             <a:avLst/>
@@ -6975,8 +6975,8 @@
         </p:nvSpPr>
         <p:spPr>
           <a:xfrm>
-            <a:off x="1463040" y="3657600"/>
-            <a:ext cx="9262872" cy="822960"/>
+            <a:off x="1783080" y="3657600"/>
+            <a:ext cx="8439912" cy="822960"/>
           </a:xfrm>
           <a:prstGeom prst="rect">
             <a:avLst/>
@@ -7165,7 +7165,7 @@
         <p:spPr>
           <a:xfrm>
             <a:off x="548640" y="1325880"/>
-            <a:ext cx="11064240" cy="548640"/>
+            <a:ext cx="11091672" cy="548640"/>
           </a:xfrm>
           <a:prstGeom prst="rect">
             <a:avLst/>
@@ -8536,7 +8536,7 @@
         <p:spPr>
           <a:xfrm>
             <a:off x="548640" y="1325880"/>
-            <a:ext cx="11064240" cy="548640"/>
+            <a:ext cx="11091672" cy="548640"/>
           </a:xfrm>
           <a:prstGeom prst="rect">
             <a:avLst/>
@@ -9888,7 +9888,7 @@
         <p:spPr>
           <a:xfrm>
             <a:off x="548640" y="1325880"/>
-            <a:ext cx="6949440" cy="548640"/>
+            <a:ext cx="5669280" cy="548640"/>
           </a:xfrm>
           <a:prstGeom prst="rect">
             <a:avLst/>
@@ -9956,7 +9956,7 @@
         <p:spPr>
           <a:xfrm>
             <a:off x="548640" y="1965960"/>
-            <a:ext cx="6949440" cy="4206240"/>
+            <a:ext cx="5669280" cy="4206240"/>
           </a:xfrm>
           <a:prstGeom prst="rect">
             <a:avLst/>
@@ -10180,12 +10180,12 @@
         </p:nvSpPr>
         <p:spPr>
           <a:xfrm>
-            <a:off x="8001000" y="1417320"/>
-            <a:ext cx="3611880" cy="4480560"/>
+            <a:off x="6446520" y="1371600"/>
+            <a:ext cx="5193792" cy="4800600"/>
           </a:xfrm>
           <a:prstGeom prst="roundRect">
             <a:avLst>
-              <a:gd name="adj" fmla="val 6329"/>
+              <a:gd name="adj" fmla="val 4762"/>
             </a:avLst>
           </a:prstGeom>
           <a:solidFill>
@@ -10199,64 +10199,30 @@
           </a:ln>
         </p:spPr>
       </p:sp>
-      <p:sp>
-        <p:nvSpPr>
-          <p:cNvPr id="6" name="ko_grande"/>
-          <p:cNvSpPr txBox="1"/>
-          <p:nvPr/>
-        </p:nvSpPr>
-        <p:spPr>
-          <a:xfrm>
-            <a:off x="8092440" y="1874520"/>
-            <a:ext cx="3429000" cy="2926080"/>
-          </a:xfrm>
-          <a:prstGeom prst="rect">
-            <a:avLst/>
-          </a:prstGeom>
-          <a:noFill/>
-          <a:ln/>
-        </p:spPr>
-        <p:txBody>
-          <a:bodyPr wrap="square" lIns="0" tIns="0" rIns="0" bIns="0" rtlCol="0" anchor="ctr">
-            <a:normAutofit/>
-          </a:bodyPr>
-          <a:lstStyle/>
-          <a:p>
-            <a:pPr marL="0" indent="0" algn="ctr" eaLnBrk="1">
-              <a:buNone/>
-            </a:pPr>
-            <a:r>
-              <a:rPr lang="ko-KR" altLang="en-US" sz="8600" b="1" dirty="0">
-                <a:solidFill>
-                  <a:srgbClr val="4236F6"/>
-                </a:solidFill>
-                <a:latin typeface="Malgun Gothic" pitchFamily="34" charset="0"/>
-                <a:ea typeface="Malgun Gothic" pitchFamily="34" charset="-122"/>
-                <a:cs typeface="Malgun Gothic" pitchFamily="34" charset="-120"/>
-              </a:rPr>
-              <a:t>3번</a:t>
-            </a:r>
-            <a:endParaRPr lang="en-US" sz="8600" dirty="0"/>
-          </a:p>
-          <a:p>
-            <a:pPr marL="0" indent="0" algn="ctr" eaLnBrk="1">
-              <a:buNone/>
-            </a:pPr>
-            <a:r>
-              <a:rPr lang="ko-KR" altLang="en-US" sz="8600" b="1" dirty="0">
-                <a:solidFill>
-                  <a:srgbClr val="4236F6"/>
-                </a:solidFill>
-                <a:latin typeface="Malgun Gothic" pitchFamily="34" charset="0"/>
-                <a:ea typeface="Malgun Gothic" pitchFamily="34" charset="-122"/>
-                <a:cs typeface="Malgun Gothic" pitchFamily="34" charset="-120"/>
-              </a:rPr>
-              <a:t>출구</a:t>
-            </a:r>
-            <a:endParaRPr lang="en-US" sz="8600" dirty="0"/>
-          </a:p>
-        </p:txBody>
-      </p:sp>
+      <p:pic>
+        <p:nvPicPr>
+          <p:cNvPr id="6" name="imagen" descr="C:\Users\Chingu\AppData\Local\Temp\claude\C--Users-Chingu-Desktop-ACADEMIASEULWEB\d4111e1b-5523-44ea-97b2-b1a1d9545b9e\scratchpad\decks\cache\img_a69623e1146afdaa.png"/>
+          <p:cNvPicPr>
+            <a:picLocks noChangeAspect="1"/>
+          </p:cNvPicPr>
+          <p:nvPr/>
+        </p:nvPicPr>
+        <p:blipFill>
+          <a:blip r:embed="rId3"/>
+          <a:stretch>
+            <a:fillRect/>
+          </a:stretch>
+        </p:blipFill>
+        <p:spPr>
+          <a:xfrm>
+            <a:off x="7040833" y="1463040"/>
+            <a:ext cx="4005165" cy="4617720"/>
+          </a:xfrm>
+          <a:prstGeom prst="rect">
+            <a:avLst/>
+          </a:prstGeom>
+        </p:spPr>
+      </p:pic>
       <p:sp>
         <p:nvSpPr>
           <p:cNvPr id="25" name="Slide Number Placeholder 0"/>
@@ -10889,7 +10855,7 @@
         <p:spPr>
           <a:xfrm>
             <a:off x="548640" y="1325880"/>
-            <a:ext cx="11064240" cy="548640"/>
+            <a:ext cx="11091672" cy="548640"/>
           </a:xfrm>
           <a:prstGeom prst="rect">
             <a:avLst/>
@@ -10926,7 +10892,7 @@
         </p:nvSpPr>
         <p:spPr>
           <a:xfrm>
-            <a:off x="548640" y="2171700"/>
+            <a:off x="548640" y="2841955"/>
             <a:ext cx="457200" cy="457200"/>
           </a:xfrm>
           <a:prstGeom prst="ellipse">
@@ -10951,7 +10917,7 @@
         </p:nvSpPr>
         <p:spPr>
           <a:xfrm>
-            <a:off x="548640" y="2171700"/>
+            <a:off x="548640" y="2841955"/>
             <a:ext cx="457200" cy="457200"/>
           </a:xfrm>
           <a:prstGeom prst="rect">
@@ -10989,8 +10955,8 @@
         </p:nvSpPr>
         <p:spPr>
           <a:xfrm>
-            <a:off x="1188720" y="1965960"/>
-            <a:ext cx="5285232" cy="868680"/>
+            <a:off x="1188720" y="2476195"/>
+            <a:ext cx="5285232" cy="1188720"/>
           </a:xfrm>
           <a:prstGeom prst="rect">
             <a:avLst/>
@@ -11038,12 +11004,12 @@
         </p:nvSpPr>
         <p:spPr>
           <a:xfrm>
-            <a:off x="6702552" y="2002536"/>
-            <a:ext cx="4937760" cy="795528"/>
+            <a:off x="6702552" y="2512771"/>
+            <a:ext cx="4937760" cy="1115568"/>
           </a:xfrm>
           <a:prstGeom prst="roundRect">
             <a:avLst>
-              <a:gd name="adj" fmla="val 13793"/>
+              <a:gd name="adj" fmla="val 9836"/>
             </a:avLst>
           </a:prstGeom>
           <a:solidFill>
@@ -11065,8 +11031,8 @@
         </p:nvSpPr>
         <p:spPr>
           <a:xfrm>
-            <a:off x="6793992" y="2002536"/>
-            <a:ext cx="4754880" cy="795528"/>
+            <a:off x="6793992" y="2512771"/>
+            <a:ext cx="4754880" cy="1115568"/>
           </a:xfrm>
           <a:prstGeom prst="rect">
             <a:avLst/>
@@ -11133,7 +11099,7 @@
         </p:nvSpPr>
         <p:spPr>
           <a:xfrm>
-            <a:off x="548640" y="3168396"/>
+            <a:off x="548640" y="4158691"/>
             <a:ext cx="457200" cy="457200"/>
           </a:xfrm>
           <a:prstGeom prst="ellipse">
@@ -11158,7 +11124,7 @@
         </p:nvSpPr>
         <p:spPr>
           <a:xfrm>
-            <a:off x="548640" y="3168396"/>
+            <a:off x="548640" y="4158691"/>
             <a:ext cx="457200" cy="457200"/>
           </a:xfrm>
           <a:prstGeom prst="rect">
@@ -11196,8 +11162,8 @@
         </p:nvSpPr>
         <p:spPr>
           <a:xfrm>
-            <a:off x="1188720" y="2962656"/>
-            <a:ext cx="5285232" cy="868680"/>
+            <a:off x="1188720" y="3792931"/>
+            <a:ext cx="5285232" cy="1188720"/>
           </a:xfrm>
           <a:prstGeom prst="rect">
             <a:avLst/>
@@ -11245,12 +11211,12 @@
         </p:nvSpPr>
         <p:spPr>
           <a:xfrm>
-            <a:off x="6702552" y="2999232"/>
-            <a:ext cx="4937760" cy="795528"/>
+            <a:off x="6702552" y="3829507"/>
+            <a:ext cx="4937760" cy="1115568"/>
           </a:xfrm>
           <a:prstGeom prst="roundRect">
             <a:avLst>
-              <a:gd name="adj" fmla="val 13793"/>
+              <a:gd name="adj" fmla="val 9836"/>
             </a:avLst>
           </a:prstGeom>
           <a:solidFill>
@@ -11272,8 +11238,8 @@
         </p:nvSpPr>
         <p:spPr>
           <a:xfrm>
-            <a:off x="6793992" y="2999232"/>
-            <a:ext cx="4754880" cy="795528"/>
+            <a:off x="6793992" y="3829507"/>
+            <a:ext cx="4754880" cy="1115568"/>
           </a:xfrm>
           <a:prstGeom prst="rect">
             <a:avLst/>
@@ -11621,7 +11587,7 @@
         <p:spPr>
           <a:xfrm>
             <a:off x="548640" y="1325880"/>
-            <a:ext cx="11064240" cy="548640"/>
+            <a:ext cx="11091672" cy="548640"/>
           </a:xfrm>
           <a:prstGeom prst="rect">
             <a:avLst/>
@@ -11652,14 +11618,72 @@
       </p:sp>
       <p:sp>
         <p:nvSpPr>
-          <p:cNvPr id="4" name="num_0"/>
+          <p:cNvPr id="4" name="card_0"/>
           <p:cNvSpPr/>
           <p:nvPr/>
         </p:nvSpPr>
         <p:spPr>
           <a:xfrm>
-            <a:off x="548640" y="2106778"/>
-            <a:ext cx="457200" cy="457200"/>
+            <a:off x="548640" y="1965960"/>
+            <a:ext cx="2072030" cy="4206240"/>
+          </a:xfrm>
+          <a:prstGeom prst="roundRect">
+            <a:avLst>
+              <a:gd name="adj" fmla="val 6620"/>
+            </a:avLst>
+          </a:prstGeom>
+          <a:solidFill>
+            <a:srgbClr val="FFFFFF"/>
+          </a:solidFill>
+          <a:ln w="12700">
+            <a:solidFill>
+              <a:srgbClr val="D9D7F7"/>
+            </a:solidFill>
+            <a:prstDash val="solid"/>
+          </a:ln>
+          <a:effectLst>
+            <a:outerShdw blurRad="76200" dist="25400" dir="5400000" algn="bl" rotWithShape="0">
+              <a:srgbClr val="14142B">
+                <a:alpha val="12000"/>
+              </a:srgbClr>
+            </a:outerShdw>
+          </a:effectLst>
+        </p:spPr>
+      </p:sp>
+      <p:pic>
+        <p:nvPicPr>
+          <p:cNvPr id="5" name="item_img_0" descr="C:\Users\Chingu\AppData\Local\Temp\claude\C--Users-Chingu-Desktop-ACADEMIASEULWEB\d4111e1b-5523-44ea-97b2-b1a1d9545b9e\scratchpad\decks\cache\img_9326893e8083d220.png"/>
+          <p:cNvPicPr>
+            <a:picLocks noChangeAspect="1"/>
+          </p:cNvPicPr>
+          <p:nvPr/>
+        </p:nvPicPr>
+        <p:blipFill>
+          <a:blip r:embed="rId3"/>
+          <a:stretch>
+            <a:fillRect/>
+          </a:stretch>
+        </p:blipFill>
+        <p:spPr>
+          <a:xfrm>
+            <a:off x="670255" y="2057400"/>
+            <a:ext cx="1828800" cy="1828800"/>
+          </a:xfrm>
+          <a:prstGeom prst="rect">
+            <a:avLst/>
+          </a:prstGeom>
+        </p:spPr>
+      </p:pic>
+      <p:sp>
+        <p:nvSpPr>
+          <p:cNvPr id="6" name="num_0"/>
+          <p:cNvSpPr/>
+          <p:nvPr/>
+        </p:nvSpPr>
+        <p:spPr>
+          <a:xfrm>
+            <a:off x="640080" y="2057400"/>
+            <a:ext cx="420624" cy="420624"/>
           </a:xfrm>
           <a:prstGeom prst="ellipse">
             <a:avLst/>
@@ -11667,9 +11691,9 @@
           <a:solidFill>
             <a:srgbClr val="003478"/>
           </a:solidFill>
-          <a:ln w="12700">
+          <a:ln w="19050">
             <a:solidFill>
-              <a:srgbClr val="003478"/>
+              <a:srgbClr val="FFFFFF"/>
             </a:solidFill>
             <a:prstDash val="solid"/>
           </a:ln>
@@ -11677,14 +11701,14 @@
       </p:sp>
       <p:sp>
         <p:nvSpPr>
-          <p:cNvPr id="5" name="Text 3"/>
+          <p:cNvPr id="7" name="Text 4"/>
           <p:cNvSpPr txBox="1"/>
           <p:nvPr/>
         </p:nvSpPr>
         <p:spPr>
           <a:xfrm>
-            <a:off x="548640" y="2106778"/>
-            <a:ext cx="457200" cy="457200"/>
+            <a:off x="640080" y="2057400"/>
+            <a:ext cx="420624" cy="420624"/>
           </a:xfrm>
           <a:prstGeom prst="rect">
             <a:avLst/>
@@ -11702,27 +11726,27 @@
               <a:buNone/>
             </a:pPr>
             <a:r>
-              <a:rPr lang="en-US" sz="1600" b="1" dirty="0">
+              <a:rPr lang="en-US" sz="1500" b="1" dirty="0">
                 <a:solidFill>
                   <a:srgbClr val="FFFFFF"/>
                 </a:solidFill>
               </a:rPr>
               <a:t>1</a:t>
             </a:r>
-            <a:endParaRPr lang="en-US" sz="1600" dirty="0"/>
-          </a:p>
-        </p:txBody>
-      </p:sp>
-      <p:sp>
-        <p:nvSpPr>
-          <p:cNvPr id="6" name="Text 4"/>
+            <a:endParaRPr lang="en-US" sz="1500" dirty="0"/>
+          </a:p>
+        </p:txBody>
+      </p:sp>
+      <p:sp>
+        <p:nvSpPr>
+          <p:cNvPr id="8" name="Text 5"/>
           <p:cNvSpPr txBox="1"/>
           <p:nvPr/>
         </p:nvSpPr>
         <p:spPr>
           <a:xfrm>
-            <a:off x="1188720" y="1965960"/>
-            <a:ext cx="4462272" cy="738835"/>
+            <a:off x="640080" y="3931920"/>
+            <a:ext cx="1889150" cy="1234440"/>
           </a:xfrm>
           <a:prstGeom prst="rect">
             <a:avLst/>
@@ -11736,35 +11760,35 @@
           </a:bodyPr>
           <a:lstStyle/>
           <a:p>
-            <a:pPr marL="0" indent="0" eaLnBrk="1">
+            <a:pPr marL="0" indent="0" algn="ctr" eaLnBrk="1">
               <a:buNone/>
             </a:pPr>
             <a:r>
-              <a:rPr lang="en-US" sz="2400" dirty="0">
+              <a:rPr lang="en-US" sz="1500" dirty="0">
                 <a:solidFill>
                   <a:srgbClr val="14142B"/>
                 </a:solidFill>
               </a:rPr>
               <a:t>Escucha y escribe el número</a:t>
             </a:r>
-            <a:endParaRPr lang="en-US" sz="2400" dirty="0"/>
-          </a:p>
-        </p:txBody>
-      </p:sp>
-      <p:sp>
-        <p:nvSpPr>
-          <p:cNvPr id="7" name="rev_0_caja"/>
+            <a:endParaRPr lang="en-US" sz="1500" dirty="0"/>
+          </a:p>
+        </p:txBody>
+      </p:sp>
+      <p:sp>
+        <p:nvSpPr>
+          <p:cNvPr id="9" name="rev_0_caja"/>
           <p:cNvSpPr/>
           <p:nvPr/>
         </p:nvSpPr>
         <p:spPr>
           <a:xfrm>
-            <a:off x="5879592" y="2002536"/>
-            <a:ext cx="5760720" cy="665683"/>
+            <a:off x="658368" y="5212080"/>
+            <a:ext cx="1852574" cy="868680"/>
           </a:xfrm>
           <a:prstGeom prst="roundRect">
             <a:avLst>
-              <a:gd name="adj" fmla="val 16484"/>
+              <a:gd name="adj" fmla="val 12632"/>
             </a:avLst>
           </a:prstGeom>
           <a:solidFill>
@@ -11780,14 +11804,14 @@
       </p:sp>
       <p:sp>
         <p:nvSpPr>
-          <p:cNvPr id="8" name="rev_0_txt"/>
+          <p:cNvPr id="10" name="rev_0_txt"/>
           <p:cNvSpPr txBox="1"/>
           <p:nvPr/>
         </p:nvSpPr>
         <p:spPr>
           <a:xfrm>
-            <a:off x="5971032" y="2002536"/>
-            <a:ext cx="5577840" cy="665683"/>
+            <a:off x="685800" y="5212080"/>
+            <a:ext cx="1797710" cy="868680"/>
           </a:xfrm>
           <a:prstGeom prst="rect">
             <a:avLst/>
@@ -11805,7 +11829,7 @@
               <a:buNone/>
             </a:pPr>
             <a:r>
-              <a:rPr lang="ko-KR" altLang="en-US" sz="2200" b="1" dirty="0">
+              <a:rPr lang="ko-KR" altLang="en-US" sz="1200" b="1" dirty="0">
                 <a:solidFill>
                   <a:srgbClr val="FFFFFF"/>
                 </a:solidFill>
@@ -11816,27 +11840,85 @@
               <a:t>27 (이십칠</a:t>
             </a:r>
             <a:r>
-              <a:rPr lang="en-US" sz="2200" b="1" dirty="0">
+              <a:rPr lang="en-US" sz="1200" b="1" dirty="0">
                 <a:solidFill>
                   <a:srgbClr val="FFFFFF"/>
                 </a:solidFill>
               </a:rPr>
               <a:t>)</a:t>
             </a:r>
-            <a:endParaRPr lang="en-US" sz="2200" dirty="0"/>
-          </a:p>
-        </p:txBody>
-      </p:sp>
-      <p:sp>
-        <p:nvSpPr>
-          <p:cNvPr id="9" name="num_1"/>
+            <a:endParaRPr lang="en-US" sz="1200" dirty="0"/>
+          </a:p>
+        </p:txBody>
+      </p:sp>
+      <p:sp>
+        <p:nvSpPr>
+          <p:cNvPr id="11" name="card_1"/>
           <p:cNvSpPr/>
           <p:nvPr/>
         </p:nvSpPr>
         <p:spPr>
           <a:xfrm>
-            <a:off x="548640" y="2973629"/>
-            <a:ext cx="457200" cy="457200"/>
+            <a:off x="2803550" y="1965960"/>
+            <a:ext cx="2072030" cy="4206240"/>
+          </a:xfrm>
+          <a:prstGeom prst="roundRect">
+            <a:avLst>
+              <a:gd name="adj" fmla="val 6620"/>
+            </a:avLst>
+          </a:prstGeom>
+          <a:solidFill>
+            <a:srgbClr val="FFFFFF"/>
+          </a:solidFill>
+          <a:ln w="12700">
+            <a:solidFill>
+              <a:srgbClr val="D9D7F7"/>
+            </a:solidFill>
+            <a:prstDash val="solid"/>
+          </a:ln>
+          <a:effectLst>
+            <a:outerShdw blurRad="76200" dist="25400" dir="5400000" algn="bl" rotWithShape="0">
+              <a:srgbClr val="14142B">
+                <a:alpha val="12000"/>
+              </a:srgbClr>
+            </a:outerShdw>
+          </a:effectLst>
+        </p:spPr>
+      </p:sp>
+      <p:pic>
+        <p:nvPicPr>
+          <p:cNvPr id="12" name="item_img_1" descr="C:\Users\Chingu\AppData\Local\Temp\claude\C--Users-Chingu-Desktop-ACADEMIASEULWEB\d4111e1b-5523-44ea-97b2-b1a1d9545b9e\scratchpad\decks\cache\img_c60c0ed04787e9be.png"/>
+          <p:cNvPicPr>
+            <a:picLocks noChangeAspect="1"/>
+          </p:cNvPicPr>
+          <p:nvPr/>
+        </p:nvPicPr>
+        <p:blipFill>
+          <a:blip r:embed="rId3"/>
+          <a:stretch>
+            <a:fillRect/>
+          </a:stretch>
+        </p:blipFill>
+        <p:spPr>
+          <a:xfrm>
+            <a:off x="2925166" y="2057400"/>
+            <a:ext cx="1828800" cy="1828800"/>
+          </a:xfrm>
+          <a:prstGeom prst="rect">
+            <a:avLst/>
+          </a:prstGeom>
+        </p:spPr>
+      </p:pic>
+      <p:sp>
+        <p:nvSpPr>
+          <p:cNvPr id="13" name="num_1"/>
+          <p:cNvSpPr/>
+          <p:nvPr/>
+        </p:nvSpPr>
+        <p:spPr>
+          <a:xfrm>
+            <a:off x="2894990" y="2057400"/>
+            <a:ext cx="420624" cy="420624"/>
           </a:xfrm>
           <a:prstGeom prst="ellipse">
             <a:avLst/>
@@ -11844,9 +11926,9 @@
           <a:solidFill>
             <a:srgbClr val="003478"/>
           </a:solidFill>
-          <a:ln w="12700">
+          <a:ln w="19050">
             <a:solidFill>
-              <a:srgbClr val="003478"/>
+              <a:srgbClr val="FFFFFF"/>
             </a:solidFill>
             <a:prstDash val="solid"/>
           </a:ln>
@@ -11854,14 +11936,14 @@
       </p:sp>
       <p:sp>
         <p:nvSpPr>
-          <p:cNvPr id="10" name="Text 8"/>
+          <p:cNvPr id="14" name="Text 10"/>
           <p:cNvSpPr txBox="1"/>
           <p:nvPr/>
         </p:nvSpPr>
         <p:spPr>
           <a:xfrm>
-            <a:off x="548640" y="2973629"/>
-            <a:ext cx="457200" cy="457200"/>
+            <a:off x="2894990" y="2057400"/>
+            <a:ext cx="420624" cy="420624"/>
           </a:xfrm>
           <a:prstGeom prst="rect">
             <a:avLst/>
@@ -11879,27 +11961,27 @@
               <a:buNone/>
             </a:pPr>
             <a:r>
-              <a:rPr lang="en-US" sz="1600" b="1" dirty="0">
+              <a:rPr lang="en-US" sz="1500" b="1" dirty="0">
                 <a:solidFill>
                   <a:srgbClr val="FFFFFF"/>
                 </a:solidFill>
               </a:rPr>
               <a:t>2</a:t>
             </a:r>
-            <a:endParaRPr lang="en-US" sz="1600" dirty="0"/>
-          </a:p>
-        </p:txBody>
-      </p:sp>
-      <p:sp>
-        <p:nvSpPr>
-          <p:cNvPr id="11" name="Text 9"/>
+            <a:endParaRPr lang="en-US" sz="1500" dirty="0"/>
+          </a:p>
+        </p:txBody>
+      </p:sp>
+      <p:sp>
+        <p:nvSpPr>
+          <p:cNvPr id="15" name="Text 11"/>
           <p:cNvSpPr txBox="1"/>
           <p:nvPr/>
         </p:nvSpPr>
         <p:spPr>
           <a:xfrm>
-            <a:off x="1188720" y="2832811"/>
-            <a:ext cx="4462272" cy="738835"/>
+            <a:off x="2894990" y="3931920"/>
+            <a:ext cx="1889150" cy="1234440"/>
           </a:xfrm>
           <a:prstGeom prst="rect">
             <a:avLst/>
@@ -11913,35 +11995,35 @@
           </a:bodyPr>
           <a:lstStyle/>
           <a:p>
-            <a:pPr marL="0" indent="0" eaLnBrk="1">
+            <a:pPr marL="0" indent="0" algn="ctr" eaLnBrk="1">
               <a:buNone/>
             </a:pPr>
             <a:r>
-              <a:rPr lang="en-US" sz="2400" dirty="0">
+              <a:rPr lang="en-US" sz="1500" dirty="0">
                 <a:solidFill>
                   <a:srgbClr val="14142B"/>
                 </a:solidFill>
               </a:rPr>
               <a:t>Escucha y escribe el número</a:t>
             </a:r>
-            <a:endParaRPr lang="en-US" sz="2400" dirty="0"/>
-          </a:p>
-        </p:txBody>
-      </p:sp>
-      <p:sp>
-        <p:nvSpPr>
-          <p:cNvPr id="12" name="rev_1_caja"/>
+            <a:endParaRPr lang="en-US" sz="1500" dirty="0"/>
+          </a:p>
+        </p:txBody>
+      </p:sp>
+      <p:sp>
+        <p:nvSpPr>
+          <p:cNvPr id="16" name="rev_1_caja"/>
           <p:cNvSpPr/>
           <p:nvPr/>
         </p:nvSpPr>
         <p:spPr>
           <a:xfrm>
-            <a:off x="5879592" y="2869387"/>
-            <a:ext cx="5760720" cy="665683"/>
+            <a:off x="2913278" y="5212080"/>
+            <a:ext cx="1852574" cy="868680"/>
           </a:xfrm>
           <a:prstGeom prst="roundRect">
             <a:avLst>
-              <a:gd name="adj" fmla="val 16484"/>
+              <a:gd name="adj" fmla="val 12632"/>
             </a:avLst>
           </a:prstGeom>
           <a:solidFill>
@@ -11957,14 +12039,14 @@
       </p:sp>
       <p:sp>
         <p:nvSpPr>
-          <p:cNvPr id="13" name="rev_1_txt"/>
+          <p:cNvPr id="17" name="rev_1_txt"/>
           <p:cNvSpPr txBox="1"/>
           <p:nvPr/>
         </p:nvSpPr>
         <p:spPr>
           <a:xfrm>
-            <a:off x="5971032" y="2869387"/>
-            <a:ext cx="5577840" cy="665683"/>
+            <a:off x="2940710" y="5212080"/>
+            <a:ext cx="1797710" cy="868680"/>
           </a:xfrm>
           <a:prstGeom prst="rect">
             <a:avLst/>
@@ -11982,7 +12064,7 @@
               <a:buNone/>
             </a:pPr>
             <a:r>
-              <a:rPr lang="ko-KR" altLang="en-US" sz="2200" b="1" dirty="0">
+              <a:rPr lang="ko-KR" altLang="en-US" sz="1200" b="1" dirty="0">
                 <a:solidFill>
                   <a:srgbClr val="FFFFFF"/>
                 </a:solidFill>
@@ -11993,27 +12075,85 @@
               <a:t>84 (팔십사</a:t>
             </a:r>
             <a:r>
-              <a:rPr lang="en-US" sz="2200" b="1" dirty="0">
+              <a:rPr lang="en-US" sz="1200" b="1" dirty="0">
                 <a:solidFill>
                   <a:srgbClr val="FFFFFF"/>
                 </a:solidFill>
               </a:rPr>
               <a:t>)</a:t>
             </a:r>
-            <a:endParaRPr lang="en-US" sz="2200" dirty="0"/>
-          </a:p>
-        </p:txBody>
-      </p:sp>
-      <p:sp>
-        <p:nvSpPr>
-          <p:cNvPr id="14" name="num_2"/>
+            <a:endParaRPr lang="en-US" sz="1200" dirty="0"/>
+          </a:p>
+        </p:txBody>
+      </p:sp>
+      <p:sp>
+        <p:nvSpPr>
+          <p:cNvPr id="18" name="card_2"/>
           <p:cNvSpPr/>
           <p:nvPr/>
         </p:nvSpPr>
         <p:spPr>
           <a:xfrm>
-            <a:off x="548640" y="3840480"/>
-            <a:ext cx="457200" cy="457200"/>
+            <a:off x="5058461" y="1965960"/>
+            <a:ext cx="2072030" cy="4206240"/>
+          </a:xfrm>
+          <a:prstGeom prst="roundRect">
+            <a:avLst>
+              <a:gd name="adj" fmla="val 6620"/>
+            </a:avLst>
+          </a:prstGeom>
+          <a:solidFill>
+            <a:srgbClr val="FFFFFF"/>
+          </a:solidFill>
+          <a:ln w="12700">
+            <a:solidFill>
+              <a:srgbClr val="D9D7F7"/>
+            </a:solidFill>
+            <a:prstDash val="solid"/>
+          </a:ln>
+          <a:effectLst>
+            <a:outerShdw blurRad="76200" dist="25400" dir="5400000" algn="bl" rotWithShape="0">
+              <a:srgbClr val="14142B">
+                <a:alpha val="12000"/>
+              </a:srgbClr>
+            </a:outerShdw>
+          </a:effectLst>
+        </p:spPr>
+      </p:sp>
+      <p:pic>
+        <p:nvPicPr>
+          <p:cNvPr id="19" name="item_img_2" descr="C:\Users\Chingu\AppData\Local\Temp\claude\C--Users-Chingu-Desktop-ACADEMIASEULWEB\d4111e1b-5523-44ea-97b2-b1a1d9545b9e\scratchpad\decks\cache\img_3124a2973042906a.png"/>
+          <p:cNvPicPr>
+            <a:picLocks noChangeAspect="1"/>
+          </p:cNvPicPr>
+          <p:nvPr/>
+        </p:nvPicPr>
+        <p:blipFill>
+          <a:blip r:embed="rId4"/>
+          <a:stretch>
+            <a:fillRect/>
+          </a:stretch>
+        </p:blipFill>
+        <p:spPr>
+          <a:xfrm>
+            <a:off x="5180076" y="2057400"/>
+            <a:ext cx="1828800" cy="1828800"/>
+          </a:xfrm>
+          <a:prstGeom prst="rect">
+            <a:avLst/>
+          </a:prstGeom>
+        </p:spPr>
+      </p:pic>
+      <p:sp>
+        <p:nvSpPr>
+          <p:cNvPr id="20" name="num_2"/>
+          <p:cNvSpPr/>
+          <p:nvPr/>
+        </p:nvSpPr>
+        <p:spPr>
+          <a:xfrm>
+            <a:off x="5149901" y="2057400"/>
+            <a:ext cx="420624" cy="420624"/>
           </a:xfrm>
           <a:prstGeom prst="ellipse">
             <a:avLst/>
@@ -12021,9 +12161,9 @@
           <a:solidFill>
             <a:srgbClr val="003478"/>
           </a:solidFill>
-          <a:ln w="12700">
+          <a:ln w="19050">
             <a:solidFill>
-              <a:srgbClr val="003478"/>
+              <a:srgbClr val="FFFFFF"/>
             </a:solidFill>
             <a:prstDash val="solid"/>
           </a:ln>
@@ -12031,14 +12171,14 @@
       </p:sp>
       <p:sp>
         <p:nvSpPr>
-          <p:cNvPr id="15" name="Text 13"/>
+          <p:cNvPr id="21" name="Text 16"/>
           <p:cNvSpPr txBox="1"/>
           <p:nvPr/>
         </p:nvSpPr>
         <p:spPr>
           <a:xfrm>
-            <a:off x="548640" y="3840480"/>
-            <a:ext cx="457200" cy="457200"/>
+            <a:off x="5149901" y="2057400"/>
+            <a:ext cx="420624" cy="420624"/>
           </a:xfrm>
           <a:prstGeom prst="rect">
             <a:avLst/>
@@ -12056,27 +12196,27 @@
               <a:buNone/>
             </a:pPr>
             <a:r>
-              <a:rPr lang="en-US" sz="1600" b="1" dirty="0">
+              <a:rPr lang="en-US" sz="1500" b="1" dirty="0">
                 <a:solidFill>
                   <a:srgbClr val="FFFFFF"/>
                 </a:solidFill>
               </a:rPr>
               <a:t>3</a:t>
             </a:r>
-            <a:endParaRPr lang="en-US" sz="1600" dirty="0"/>
-          </a:p>
-        </p:txBody>
-      </p:sp>
-      <p:sp>
-        <p:nvSpPr>
-          <p:cNvPr id="16" name="Text 14"/>
+            <a:endParaRPr lang="en-US" sz="1500" dirty="0"/>
+          </a:p>
+        </p:txBody>
+      </p:sp>
+      <p:sp>
+        <p:nvSpPr>
+          <p:cNvPr id="22" name="Text 17"/>
           <p:cNvSpPr txBox="1"/>
           <p:nvPr/>
         </p:nvSpPr>
         <p:spPr>
           <a:xfrm>
-            <a:off x="1188720" y="3699662"/>
-            <a:ext cx="4462272" cy="738835"/>
+            <a:off x="5149901" y="3931920"/>
+            <a:ext cx="1889150" cy="1234440"/>
           </a:xfrm>
           <a:prstGeom prst="rect">
             <a:avLst/>
@@ -12090,35 +12230,35 @@
           </a:bodyPr>
           <a:lstStyle/>
           <a:p>
-            <a:pPr marL="0" indent="0" eaLnBrk="1">
+            <a:pPr marL="0" indent="0" algn="ctr" eaLnBrk="1">
               <a:buNone/>
             </a:pPr>
             <a:r>
-              <a:rPr lang="en-US" sz="2300" dirty="0">
+              <a:rPr lang="en-US" sz="1500" dirty="0">
                 <a:solidFill>
                   <a:srgbClr val="14142B"/>
                 </a:solidFill>
               </a:rPr>
               <a:t>Escucha y escribe los 4 dígitos de un teléfono</a:t>
             </a:r>
-            <a:endParaRPr lang="en-US" sz="2300" dirty="0"/>
-          </a:p>
-        </p:txBody>
-      </p:sp>
-      <p:sp>
-        <p:nvSpPr>
-          <p:cNvPr id="17" name="rev_2_caja"/>
+            <a:endParaRPr lang="en-US" sz="1500" dirty="0"/>
+          </a:p>
+        </p:txBody>
+      </p:sp>
+      <p:sp>
+        <p:nvSpPr>
+          <p:cNvPr id="23" name="rev_2_caja"/>
           <p:cNvSpPr/>
           <p:nvPr/>
         </p:nvSpPr>
         <p:spPr>
           <a:xfrm>
-            <a:off x="5879592" y="3736238"/>
-            <a:ext cx="5760720" cy="665683"/>
+            <a:off x="5168189" y="5212080"/>
+            <a:ext cx="1852574" cy="868680"/>
           </a:xfrm>
           <a:prstGeom prst="roundRect">
             <a:avLst>
-              <a:gd name="adj" fmla="val 16484"/>
+              <a:gd name="adj" fmla="val 12632"/>
             </a:avLst>
           </a:prstGeom>
           <a:solidFill>
@@ -12134,14 +12274,14 @@
       </p:sp>
       <p:sp>
         <p:nvSpPr>
-          <p:cNvPr id="18" name="rev_2_txt"/>
+          <p:cNvPr id="24" name="rev_2_txt"/>
           <p:cNvSpPr txBox="1"/>
           <p:nvPr/>
         </p:nvSpPr>
         <p:spPr>
           <a:xfrm>
-            <a:off x="5971032" y="3736238"/>
-            <a:ext cx="5577840" cy="665683"/>
+            <a:off x="5195621" y="5212080"/>
+            <a:ext cx="1797710" cy="868680"/>
           </a:xfrm>
           <a:prstGeom prst="rect">
             <a:avLst/>
@@ -12159,7 +12299,7 @@
               <a:buNone/>
             </a:pPr>
             <a:r>
-              <a:rPr lang="ko-KR" altLang="en-US" sz="2200" b="1" dirty="0">
+              <a:rPr lang="ko-KR" altLang="en-US" sz="1200" b="1" dirty="0">
                 <a:solidFill>
                   <a:srgbClr val="FFFFFF"/>
                 </a:solidFill>
@@ -12170,7 +12310,7 @@
               <a:t>7063 (칠</a:t>
             </a:r>
             <a:r>
-              <a:rPr lang="en-US" sz="2200" b="1" dirty="0">
+              <a:rPr lang="en-US" sz="1200" b="1" dirty="0">
                 <a:solidFill>
                   <a:srgbClr val="FFFFFF"/>
                 </a:solidFill>
@@ -12178,7 +12318,7 @@
               <a:t>, </a:t>
             </a:r>
             <a:r>
-              <a:rPr lang="ko-KR" altLang="en-US" sz="2200" b="1" dirty="0">
+              <a:rPr lang="ko-KR" altLang="en-US" sz="1200" b="1" dirty="0">
                 <a:solidFill>
                   <a:srgbClr val="FFFFFF"/>
                 </a:solidFill>
@@ -12189,7 +12329,7 @@
               <a:t>공</a:t>
             </a:r>
             <a:r>
-              <a:rPr lang="en-US" sz="2200" b="1" dirty="0">
+              <a:rPr lang="en-US" sz="1200" b="1" dirty="0">
                 <a:solidFill>
                   <a:srgbClr val="FFFFFF"/>
                 </a:solidFill>
@@ -12197,7 +12337,7 @@
               <a:t>, </a:t>
             </a:r>
             <a:r>
-              <a:rPr lang="ko-KR" altLang="en-US" sz="2200" b="1" dirty="0">
+              <a:rPr lang="ko-KR" altLang="en-US" sz="1200" b="1" dirty="0">
                 <a:solidFill>
                   <a:srgbClr val="FFFFFF"/>
                 </a:solidFill>
@@ -12208,7 +12348,7 @@
               <a:t>육</a:t>
             </a:r>
             <a:r>
-              <a:rPr lang="en-US" sz="2200" b="1" dirty="0">
+              <a:rPr lang="en-US" sz="1200" b="1" dirty="0">
                 <a:solidFill>
                   <a:srgbClr val="FFFFFF"/>
                 </a:solidFill>
@@ -12216,7 +12356,7 @@
               <a:t>, </a:t>
             </a:r>
             <a:r>
-              <a:rPr lang="ko-KR" altLang="en-US" sz="2200" b="1" dirty="0">
+              <a:rPr lang="ko-KR" altLang="en-US" sz="1200" b="1" dirty="0">
                 <a:solidFill>
                   <a:srgbClr val="FFFFFF"/>
                 </a:solidFill>
@@ -12227,27 +12367,85 @@
               <a:t>삼</a:t>
             </a:r>
             <a:r>
-              <a:rPr lang="en-US" sz="2200" b="1" dirty="0">
+              <a:rPr lang="en-US" sz="1200" b="1" dirty="0">
                 <a:solidFill>
                   <a:srgbClr val="FFFFFF"/>
                 </a:solidFill>
               </a:rPr>
               <a:t>)</a:t>
             </a:r>
-            <a:endParaRPr lang="en-US" sz="2200" dirty="0"/>
-          </a:p>
-        </p:txBody>
-      </p:sp>
-      <p:sp>
-        <p:nvSpPr>
-          <p:cNvPr id="19" name="num_3"/>
+            <a:endParaRPr lang="en-US" sz="1200" dirty="0"/>
+          </a:p>
+        </p:txBody>
+      </p:sp>
+      <p:sp>
+        <p:nvSpPr>
+          <p:cNvPr id="25" name="card_3"/>
           <p:cNvSpPr/>
           <p:nvPr/>
         </p:nvSpPr>
         <p:spPr>
           <a:xfrm>
-            <a:off x="548640" y="4707331"/>
-            <a:ext cx="457200" cy="457200"/>
+            <a:off x="7313371" y="1965960"/>
+            <a:ext cx="2072030" cy="4206240"/>
+          </a:xfrm>
+          <a:prstGeom prst="roundRect">
+            <a:avLst>
+              <a:gd name="adj" fmla="val 6620"/>
+            </a:avLst>
+          </a:prstGeom>
+          <a:solidFill>
+            <a:srgbClr val="FFFFFF"/>
+          </a:solidFill>
+          <a:ln w="12700">
+            <a:solidFill>
+              <a:srgbClr val="D9D7F7"/>
+            </a:solidFill>
+            <a:prstDash val="solid"/>
+          </a:ln>
+          <a:effectLst>
+            <a:outerShdw blurRad="76200" dist="25400" dir="5400000" algn="bl" rotWithShape="0">
+              <a:srgbClr val="14142B">
+                <a:alpha val="12000"/>
+              </a:srgbClr>
+            </a:outerShdw>
+          </a:effectLst>
+        </p:spPr>
+      </p:sp>
+      <p:pic>
+        <p:nvPicPr>
+          <p:cNvPr id="26" name="item_img_3" descr="C:\Users\Chingu\AppData\Local\Temp\claude\C--Users-Chingu-Desktop-ACADEMIASEULWEB\d4111e1b-5523-44ea-97b2-b1a1d9545b9e\scratchpad\decks\cache\img_4f9946648964413b.png"/>
+          <p:cNvPicPr>
+            <a:picLocks noChangeAspect="1"/>
+          </p:cNvPicPr>
+          <p:nvPr/>
+        </p:nvPicPr>
+        <p:blipFill>
+          <a:blip r:embed="rId5"/>
+          <a:stretch>
+            <a:fillRect/>
+          </a:stretch>
+        </p:blipFill>
+        <p:spPr>
+          <a:xfrm>
+            <a:off x="7434986" y="2057400"/>
+            <a:ext cx="1828800" cy="1828800"/>
+          </a:xfrm>
+          <a:prstGeom prst="rect">
+            <a:avLst/>
+          </a:prstGeom>
+        </p:spPr>
+      </p:pic>
+      <p:sp>
+        <p:nvSpPr>
+          <p:cNvPr id="27" name="num_3"/>
+          <p:cNvSpPr/>
+          <p:nvPr/>
+        </p:nvSpPr>
+        <p:spPr>
+          <a:xfrm>
+            <a:off x="7404811" y="2057400"/>
+            <a:ext cx="420624" cy="420624"/>
           </a:xfrm>
           <a:prstGeom prst="ellipse">
             <a:avLst/>
@@ -12255,9 +12453,9 @@
           <a:solidFill>
             <a:srgbClr val="003478"/>
           </a:solidFill>
-          <a:ln w="12700">
+          <a:ln w="19050">
             <a:solidFill>
-              <a:srgbClr val="003478"/>
+              <a:srgbClr val="FFFFFF"/>
             </a:solidFill>
             <a:prstDash val="solid"/>
           </a:ln>
@@ -12265,14 +12463,14 @@
       </p:sp>
       <p:sp>
         <p:nvSpPr>
-          <p:cNvPr id="20" name="Text 18"/>
+          <p:cNvPr id="28" name="Text 22"/>
           <p:cNvSpPr txBox="1"/>
           <p:nvPr/>
         </p:nvSpPr>
         <p:spPr>
           <a:xfrm>
-            <a:off x="548640" y="4707331"/>
-            <a:ext cx="457200" cy="457200"/>
+            <a:off x="7404811" y="2057400"/>
+            <a:ext cx="420624" cy="420624"/>
           </a:xfrm>
           <a:prstGeom prst="rect">
             <a:avLst/>
@@ -12290,27 +12488,27 @@
               <a:buNone/>
             </a:pPr>
             <a:r>
-              <a:rPr lang="en-US" sz="1600" b="1" dirty="0">
+              <a:rPr lang="en-US" sz="1500" b="1" dirty="0">
                 <a:solidFill>
                   <a:srgbClr val="FFFFFF"/>
                 </a:solidFill>
               </a:rPr>
               <a:t>4</a:t>
             </a:r>
-            <a:endParaRPr lang="en-US" sz="1600" dirty="0"/>
-          </a:p>
-        </p:txBody>
-      </p:sp>
-      <p:sp>
-        <p:nvSpPr>
-          <p:cNvPr id="21" name="Text 19"/>
+            <a:endParaRPr lang="en-US" sz="1500" dirty="0"/>
+          </a:p>
+        </p:txBody>
+      </p:sp>
+      <p:sp>
+        <p:nvSpPr>
+          <p:cNvPr id="29" name="Text 23"/>
           <p:cNvSpPr txBox="1"/>
           <p:nvPr/>
         </p:nvSpPr>
         <p:spPr>
           <a:xfrm>
-            <a:off x="1188720" y="4566514"/>
-            <a:ext cx="4462272" cy="738835"/>
+            <a:off x="7404811" y="3931920"/>
+            <a:ext cx="1889150" cy="1234440"/>
           </a:xfrm>
           <a:prstGeom prst="rect">
             <a:avLst/>
@@ -12324,11 +12522,11 @@
           </a:bodyPr>
           <a:lstStyle/>
           <a:p>
-            <a:pPr marL="0" indent="0" eaLnBrk="1">
+            <a:pPr marL="0" indent="0" algn="ctr" eaLnBrk="1">
               <a:buNone/>
             </a:pPr>
             <a:r>
-              <a:rPr lang="ko-KR" altLang="en-US" sz="2300" dirty="0">
+              <a:rPr lang="ko-KR" altLang="en-US" sz="1500" dirty="0">
                 <a:solidFill>
                   <a:srgbClr val="14142B"/>
                 </a:solidFill>
@@ -12339,7 +12537,7 @@
               <a:t>(dibujo de 4 personas) 우리 가족은 </a:t>
             </a:r>
             <a:r>
-              <a:rPr lang="en-US" sz="2300" dirty="0">
+              <a:rPr lang="en-US" sz="1500" dirty="0">
                 <a:solidFill>
                   <a:srgbClr val="14142B"/>
                 </a:solidFill>
@@ -12347,7 +12545,7 @@
               <a:t>___ </a:t>
             </a:r>
             <a:r>
-              <a:rPr lang="ko-KR" altLang="en-US" sz="2300" dirty="0">
+              <a:rPr lang="ko-KR" altLang="en-US" sz="1500" dirty="0">
                 <a:solidFill>
                   <a:srgbClr val="14142B"/>
                 </a:solidFill>
@@ -12358,7 +12556,7 @@
               <a:t>명이에요</a:t>
             </a:r>
             <a:r>
-              <a:rPr lang="en-US" sz="2300" dirty="0">
+              <a:rPr lang="en-US" sz="1500" dirty="0">
                 <a:solidFill>
                   <a:srgbClr val="14142B"/>
                 </a:solidFill>
@@ -12366,7 +12564,7 @@
               <a:t>. a) </a:t>
             </a:r>
             <a:r>
-              <a:rPr lang="ko-KR" altLang="en-US" sz="2300" dirty="0">
+              <a:rPr lang="ko-KR" altLang="en-US" sz="1500" dirty="0">
                 <a:solidFill>
                   <a:srgbClr val="14142B"/>
                 </a:solidFill>
@@ -12377,7 +12575,7 @@
               <a:t>사 </a:t>
             </a:r>
             <a:r>
-              <a:rPr lang="en-US" sz="2300" dirty="0">
+              <a:rPr lang="en-US" sz="1500" dirty="0">
                 <a:solidFill>
                   <a:srgbClr val="14142B"/>
                 </a:solidFill>
@@ -12385,7 +12583,7 @@
               <a:t>b) </a:t>
             </a:r>
             <a:r>
-              <a:rPr lang="ko-KR" altLang="en-US" sz="2300" dirty="0">
+              <a:rPr lang="ko-KR" altLang="en-US" sz="1500" dirty="0">
                 <a:solidFill>
                   <a:srgbClr val="14142B"/>
                 </a:solidFill>
@@ -12396,7 +12594,7 @@
               <a:t>네 </a:t>
             </a:r>
             <a:r>
-              <a:rPr lang="en-US" sz="2300" dirty="0">
+              <a:rPr lang="en-US" sz="1500" dirty="0">
                 <a:solidFill>
                   <a:srgbClr val="14142B"/>
                 </a:solidFill>
@@ -12404,7 +12602,7 @@
               <a:t>c) </a:t>
             </a:r>
             <a:r>
-              <a:rPr lang="ko-KR" altLang="en-US" sz="2300" dirty="0">
+              <a:rPr lang="ko-KR" altLang="en-US" sz="1500" dirty="0">
                 <a:solidFill>
                   <a:srgbClr val="14142B"/>
                 </a:solidFill>
@@ -12414,24 +12612,24 @@
               </a:rPr>
               <a:t>넷</a:t>
             </a:r>
-            <a:endParaRPr lang="en-US" sz="2300" dirty="0"/>
-          </a:p>
-        </p:txBody>
-      </p:sp>
-      <p:sp>
-        <p:nvSpPr>
-          <p:cNvPr id="22" name="rev_3_caja"/>
+            <a:endParaRPr lang="en-US" sz="1500" dirty="0"/>
+          </a:p>
+        </p:txBody>
+      </p:sp>
+      <p:sp>
+        <p:nvSpPr>
+          <p:cNvPr id="30" name="rev_3_caja"/>
           <p:cNvSpPr/>
           <p:nvPr/>
         </p:nvSpPr>
         <p:spPr>
           <a:xfrm>
-            <a:off x="5879592" y="4603090"/>
-            <a:ext cx="5760720" cy="665683"/>
+            <a:off x="7423099" y="5212080"/>
+            <a:ext cx="1852574" cy="868680"/>
           </a:xfrm>
           <a:prstGeom prst="roundRect">
             <a:avLst>
-              <a:gd name="adj" fmla="val 16484"/>
+              <a:gd name="adj" fmla="val 12632"/>
             </a:avLst>
           </a:prstGeom>
           <a:solidFill>
@@ -12447,14 +12645,14 @@
       </p:sp>
       <p:sp>
         <p:nvSpPr>
-          <p:cNvPr id="23" name="rev_3_txt"/>
+          <p:cNvPr id="31" name="rev_3_txt"/>
           <p:cNvSpPr txBox="1"/>
           <p:nvPr/>
         </p:nvSpPr>
         <p:spPr>
           <a:xfrm>
-            <a:off x="5971032" y="4603090"/>
-            <a:ext cx="5577840" cy="665683"/>
+            <a:off x="7450531" y="5212080"/>
+            <a:ext cx="1797710" cy="868680"/>
           </a:xfrm>
           <a:prstGeom prst="rect">
             <a:avLst/>
@@ -12472,7 +12670,7 @@
               <a:buNone/>
             </a:pPr>
             <a:r>
-              <a:rPr lang="ko-KR" altLang="en-US" sz="1900" b="1" dirty="0">
+              <a:rPr lang="ko-KR" altLang="en-US" sz="1200" b="1" dirty="0">
                 <a:solidFill>
                   <a:srgbClr val="FFFFFF"/>
                 </a:solidFill>
@@ -12483,7 +12681,7 @@
               <a:t>b) 네 </a:t>
             </a:r>
             <a:r>
-              <a:rPr lang="en-US" sz="1900" b="1" dirty="0">
+              <a:rPr lang="en-US" sz="1200" b="1" dirty="0">
                 <a:solidFill>
                   <a:srgbClr val="FFFFFF"/>
                 </a:solidFill>
@@ -12491,7 +12689,7 @@
               <a:t>· para contar personas, nativos: </a:t>
             </a:r>
             <a:r>
-              <a:rPr lang="ko-KR" altLang="en-US" sz="1900" b="1" dirty="0">
+              <a:rPr lang="ko-KR" altLang="en-US" sz="1200" b="1" dirty="0">
                 <a:solidFill>
                   <a:srgbClr val="FFFFFF"/>
                 </a:solidFill>
@@ -12499,10 +12697,10 @@
                 <a:ea typeface="Malgun Gothic" pitchFamily="34" charset="-122"/>
                 <a:cs typeface="Malgun Gothic" pitchFamily="34" charset="-120"/>
               </a:rPr>
-              <a:t>한 명</a:t>
-            </a:r>
-            <a:r>
-              <a:rPr lang="en-US" sz="1900" b="1" dirty="0">
+              <a:t>한 명</a:t>
+            </a:r>
+            <a:r>
+              <a:rPr lang="en-US" sz="1200" b="1" dirty="0">
                 <a:solidFill>
                   <a:srgbClr val="FFFFFF"/>
                 </a:solidFill>
@@ -12510,7 +12708,7 @@
               <a:t>, </a:t>
             </a:r>
             <a:r>
-              <a:rPr lang="ko-KR" altLang="en-US" sz="1900" b="1" dirty="0">
+              <a:rPr lang="ko-KR" altLang="en-US" sz="1200" b="1" dirty="0">
                 <a:solidFill>
                   <a:srgbClr val="FFFFFF"/>
                 </a:solidFill>
@@ -12518,10 +12716,10 @@
                 <a:ea typeface="Malgun Gothic" pitchFamily="34" charset="-122"/>
                 <a:cs typeface="Malgun Gothic" pitchFamily="34" charset="-120"/>
               </a:rPr>
-              <a:t>두 명</a:t>
-            </a:r>
-            <a:r>
-              <a:rPr lang="en-US" sz="1900" b="1" dirty="0">
+              <a:t>두 명</a:t>
+            </a:r>
+            <a:r>
+              <a:rPr lang="en-US" sz="1200" b="1" dirty="0">
                 <a:solidFill>
                   <a:srgbClr val="FFFFFF"/>
                 </a:solidFill>
@@ -12529,7 +12727,7 @@
               <a:t>, </a:t>
             </a:r>
             <a:r>
-              <a:rPr lang="ko-KR" altLang="en-US" sz="1900" b="1" dirty="0">
+              <a:rPr lang="ko-KR" altLang="en-US" sz="1200" b="1" dirty="0">
                 <a:solidFill>
                   <a:srgbClr val="FFFFFF"/>
                 </a:solidFill>
@@ -12537,10 +12735,10 @@
                 <a:ea typeface="Malgun Gothic" pitchFamily="34" charset="-122"/>
                 <a:cs typeface="Malgun Gothic" pitchFamily="34" charset="-120"/>
               </a:rPr>
-              <a:t>세 명</a:t>
-            </a:r>
-            <a:r>
-              <a:rPr lang="en-US" sz="1900" b="1" dirty="0">
+              <a:t>세 명</a:t>
+            </a:r>
+            <a:r>
+              <a:rPr lang="en-US" sz="1200" b="1" dirty="0">
                 <a:solidFill>
                   <a:srgbClr val="FFFFFF"/>
                 </a:solidFill>
@@ -12548,7 +12746,7 @@
               <a:t>, </a:t>
             </a:r>
             <a:r>
-              <a:rPr lang="ko-KR" altLang="en-US" sz="1900" b="1" dirty="0">
+              <a:rPr lang="ko-KR" altLang="en-US" sz="1200" b="1" dirty="0">
                 <a:solidFill>
                   <a:srgbClr val="FFFFFF"/>
                 </a:solidFill>
@@ -12556,22 +12754,80 @@
                 <a:ea typeface="Malgun Gothic" pitchFamily="34" charset="-122"/>
                 <a:cs typeface="Malgun Gothic" pitchFamily="34" charset="-120"/>
               </a:rPr>
-              <a:t>네 명</a:t>
-            </a:r>
-            <a:endParaRPr lang="en-US" sz="1900" dirty="0"/>
-          </a:p>
-        </p:txBody>
-      </p:sp>
-      <p:sp>
-        <p:nvSpPr>
-          <p:cNvPr id="24" name="num_4"/>
+              <a:t>네 명</a:t>
+            </a:r>
+            <a:endParaRPr lang="en-US" sz="1200" dirty="0"/>
+          </a:p>
+        </p:txBody>
+      </p:sp>
+      <p:sp>
+        <p:nvSpPr>
+          <p:cNvPr id="32" name="card_4"/>
           <p:cNvSpPr/>
           <p:nvPr/>
         </p:nvSpPr>
         <p:spPr>
           <a:xfrm>
-            <a:off x="548640" y="5574182"/>
-            <a:ext cx="457200" cy="457200"/>
+            <a:off x="9568282" y="1965960"/>
+            <a:ext cx="2072030" cy="4206240"/>
+          </a:xfrm>
+          <a:prstGeom prst="roundRect">
+            <a:avLst>
+              <a:gd name="adj" fmla="val 6620"/>
+            </a:avLst>
+          </a:prstGeom>
+          <a:solidFill>
+            <a:srgbClr val="FFFFFF"/>
+          </a:solidFill>
+          <a:ln w="12700">
+            <a:solidFill>
+              <a:srgbClr val="D9D7F7"/>
+            </a:solidFill>
+            <a:prstDash val="solid"/>
+          </a:ln>
+          <a:effectLst>
+            <a:outerShdw blurRad="76200" dist="25400" dir="5400000" algn="bl" rotWithShape="0">
+              <a:srgbClr val="14142B">
+                <a:alpha val="12000"/>
+              </a:srgbClr>
+            </a:outerShdw>
+          </a:effectLst>
+        </p:spPr>
+      </p:sp>
+      <p:pic>
+        <p:nvPicPr>
+          <p:cNvPr id="33" name="item_img_4" descr="C:\Users\Chingu\AppData\Local\Temp\claude\C--Users-Chingu-Desktop-ACADEMIASEULWEB\d4111e1b-5523-44ea-97b2-b1a1d9545b9e\scratchpad\decks\cache\img_afe7e9e7798af6c6.png"/>
+          <p:cNvPicPr>
+            <a:picLocks noChangeAspect="1"/>
+          </p:cNvPicPr>
+          <p:nvPr/>
+        </p:nvPicPr>
+        <p:blipFill>
+          <a:blip r:embed="rId6"/>
+          <a:stretch>
+            <a:fillRect/>
+          </a:stretch>
+        </p:blipFill>
+        <p:spPr>
+          <a:xfrm>
+            <a:off x="9689897" y="2057400"/>
+            <a:ext cx="1828800" cy="1828800"/>
+          </a:xfrm>
+          <a:prstGeom prst="rect">
+            <a:avLst/>
+          </a:prstGeom>
+        </p:spPr>
+      </p:pic>
+      <p:sp>
+        <p:nvSpPr>
+          <p:cNvPr id="34" name="num_4"/>
+          <p:cNvSpPr/>
+          <p:nvPr/>
+        </p:nvSpPr>
+        <p:spPr>
+          <a:xfrm>
+            <a:off x="9659722" y="2057400"/>
+            <a:ext cx="420624" cy="420624"/>
           </a:xfrm>
           <a:prstGeom prst="ellipse">
             <a:avLst/>
@@ -12579,9 +12835,9 @@
           <a:solidFill>
             <a:srgbClr val="003478"/>
           </a:solidFill>
-          <a:ln w="12700">
+          <a:ln w="19050">
             <a:solidFill>
-              <a:srgbClr val="003478"/>
+              <a:srgbClr val="FFFFFF"/>
             </a:solidFill>
             <a:prstDash val="solid"/>
           </a:ln>
@@ -12589,14 +12845,14 @@
       </p:sp>
       <p:sp>
         <p:nvSpPr>
-          <p:cNvPr id="25" name="Text 23"/>
+          <p:cNvPr id="35" name="Text 28"/>
           <p:cNvSpPr txBox="1"/>
           <p:nvPr/>
         </p:nvSpPr>
         <p:spPr>
           <a:xfrm>
-            <a:off x="548640" y="5574182"/>
-            <a:ext cx="457200" cy="457200"/>
+            <a:off x="9659722" y="2057400"/>
+            <a:ext cx="420624" cy="420624"/>
           </a:xfrm>
           <a:prstGeom prst="rect">
             <a:avLst/>
@@ -12614,27 +12870,27 @@
               <a:buNone/>
             </a:pPr>
             <a:r>
-              <a:rPr lang="en-US" sz="1600" b="1" dirty="0">
+              <a:rPr lang="en-US" sz="1500" b="1" dirty="0">
                 <a:solidFill>
                   <a:srgbClr val="FFFFFF"/>
                 </a:solidFill>
               </a:rPr>
               <a:t>5</a:t>
             </a:r>
-            <a:endParaRPr lang="en-US" sz="1600" dirty="0"/>
-          </a:p>
-        </p:txBody>
-      </p:sp>
-      <p:sp>
-        <p:nvSpPr>
-          <p:cNvPr id="26" name="Text 24"/>
+            <a:endParaRPr lang="en-US" sz="1500" dirty="0"/>
+          </a:p>
+        </p:txBody>
+      </p:sp>
+      <p:sp>
+        <p:nvSpPr>
+          <p:cNvPr id="36" name="Text 29"/>
           <p:cNvSpPr txBox="1"/>
           <p:nvPr/>
         </p:nvSpPr>
         <p:spPr>
           <a:xfrm>
-            <a:off x="1188720" y="5433365"/>
-            <a:ext cx="4462272" cy="738835"/>
+            <a:off x="9659722" y="3931920"/>
+            <a:ext cx="1889150" cy="1234440"/>
           </a:xfrm>
           <a:prstGeom prst="rect">
             <a:avLst/>
@@ -12648,11 +12904,11 @@
           </a:bodyPr>
           <a:lstStyle/>
           <a:p>
-            <a:pPr marL="0" indent="0" eaLnBrk="1">
+            <a:pPr marL="0" indent="0" algn="ctr" eaLnBrk="1">
               <a:buNone/>
             </a:pPr>
             <a:r>
-              <a:rPr lang="ko-KR" altLang="en-US" sz="2100" dirty="0">
+              <a:rPr lang="ko-KR" altLang="en-US" sz="1500" dirty="0">
                 <a:solidFill>
                   <a:srgbClr val="14142B"/>
                 </a:solidFill>
@@ -12663,7 +12919,7 @@
               <a:t>Daniel (hombre) presenta a su hermana mayor: 우리 </a:t>
             </a:r>
             <a:r>
-              <a:rPr lang="en-US" sz="2100" dirty="0">
+              <a:rPr lang="en-US" sz="1500" dirty="0">
                 <a:solidFill>
                   <a:srgbClr val="14142B"/>
                 </a:solidFill>
@@ -12671,7 +12927,7 @@
               <a:t>___</a:t>
             </a:r>
             <a:r>
-              <a:rPr lang="ko-KR" altLang="en-US" sz="2100" dirty="0">
+              <a:rPr lang="ko-KR" altLang="en-US" sz="1500" dirty="0">
                 <a:solidFill>
                   <a:srgbClr val="14142B"/>
                 </a:solidFill>
@@ -12682,7 +12938,7 @@
               <a:t>예요</a:t>
             </a:r>
             <a:r>
-              <a:rPr lang="en-US" sz="2100" dirty="0">
+              <a:rPr lang="en-US" sz="1500" dirty="0">
                 <a:solidFill>
                   <a:srgbClr val="14142B"/>
                 </a:solidFill>
@@ -12690,7 +12946,7 @@
               <a:t>. a) </a:t>
             </a:r>
             <a:r>
-              <a:rPr lang="ko-KR" altLang="en-US" sz="2100" dirty="0">
+              <a:rPr lang="ko-KR" altLang="en-US" sz="1500" dirty="0">
                 <a:solidFill>
                   <a:srgbClr val="14142B"/>
                 </a:solidFill>
@@ -12701,7 +12957,7 @@
               <a:t>언니 </a:t>
             </a:r>
             <a:r>
-              <a:rPr lang="en-US" sz="2100" dirty="0">
+              <a:rPr lang="en-US" sz="1500" dirty="0">
                 <a:solidFill>
                   <a:srgbClr val="14142B"/>
                 </a:solidFill>
@@ -12709,7 +12965,7 @@
               <a:t>b) </a:t>
             </a:r>
             <a:r>
-              <a:rPr lang="ko-KR" altLang="en-US" sz="2100" dirty="0">
+              <a:rPr lang="ko-KR" altLang="en-US" sz="1500" dirty="0">
                 <a:solidFill>
                   <a:srgbClr val="14142B"/>
                 </a:solidFill>
@@ -12719,24 +12975,24 @@
               </a:rPr>
               <a:t>누나</a:t>
             </a:r>
-            <a:endParaRPr lang="en-US" sz="2100" dirty="0"/>
-          </a:p>
-        </p:txBody>
-      </p:sp>
-      <p:sp>
-        <p:nvSpPr>
-          <p:cNvPr id="27" name="rev_4_caja"/>
+            <a:endParaRPr lang="en-US" sz="1500" dirty="0"/>
+          </a:p>
+        </p:txBody>
+      </p:sp>
+      <p:sp>
+        <p:nvSpPr>
+          <p:cNvPr id="37" name="rev_4_caja"/>
           <p:cNvSpPr/>
           <p:nvPr/>
         </p:nvSpPr>
         <p:spPr>
           <a:xfrm>
-            <a:off x="5879592" y="5469941"/>
-            <a:ext cx="5760720" cy="665683"/>
+            <a:off x="9678010" y="5212080"/>
+            <a:ext cx="1852574" cy="868680"/>
           </a:xfrm>
           <a:prstGeom prst="roundRect">
             <a:avLst>
-              <a:gd name="adj" fmla="val 16484"/>
+              <a:gd name="adj" fmla="val 12632"/>
             </a:avLst>
           </a:prstGeom>
           <a:solidFill>
@@ -12752,14 +13008,14 @@
       </p:sp>
       <p:sp>
         <p:nvSpPr>
-          <p:cNvPr id="28" name="rev_4_txt"/>
+          <p:cNvPr id="38" name="rev_4_txt"/>
           <p:cNvSpPr txBox="1"/>
           <p:nvPr/>
         </p:nvSpPr>
         <p:spPr>
           <a:xfrm>
-            <a:off x="5971032" y="5469941"/>
-            <a:ext cx="5577840" cy="665683"/>
+            <a:off x="9705442" y="5212080"/>
+            <a:ext cx="1797710" cy="868680"/>
           </a:xfrm>
           <a:prstGeom prst="rect">
             <a:avLst/>
@@ -12777,7 +13033,7 @@
               <a:buNone/>
             </a:pPr>
             <a:r>
-              <a:rPr lang="ko-KR" altLang="en-US" sz="1600" b="1" dirty="0">
+              <a:rPr lang="ko-KR" altLang="en-US" sz="1200" b="1" dirty="0">
                 <a:solidFill>
                   <a:srgbClr val="FFFFFF"/>
                 </a:solidFill>
@@ -12788,7 +13044,7 @@
               <a:t>b) 누나 </a:t>
             </a:r>
             <a:r>
-              <a:rPr lang="en-US" sz="1600" b="1" dirty="0">
+              <a:rPr lang="en-US" sz="1200" b="1" dirty="0">
                 <a:solidFill>
                   <a:srgbClr val="FFFFFF"/>
                 </a:solidFill>
@@ -12796,7 +13052,7 @@
               <a:t>· </a:t>
             </a:r>
             <a:r>
-              <a:rPr lang="ko-KR" altLang="en-US" sz="1600" b="1" dirty="0">
+              <a:rPr lang="ko-KR" altLang="en-US" sz="1200" b="1" dirty="0">
                 <a:solidFill>
                   <a:srgbClr val="FFFFFF"/>
                 </a:solidFill>
@@ -12807,20 +13063,20 @@
               <a:t>언니 </a:t>
             </a:r>
             <a:r>
-              <a:rPr lang="en-US" sz="1600" b="1" dirty="0">
+              <a:rPr lang="en-US" sz="1200" b="1" dirty="0">
                 <a:solidFill>
                   <a:srgbClr val="FFFFFF"/>
                 </a:solidFill>
               </a:rPr>
               <a:t>es hermana mayor para una mujer</a:t>
             </a:r>
-            <a:endParaRPr lang="en-US" sz="1600" dirty="0"/>
-          </a:p>
-        </p:txBody>
-      </p:sp>
-      <p:sp>
-        <p:nvSpPr>
-          <p:cNvPr id="29" name="Slide Number Placeholder 0"/>
+            <a:endParaRPr lang="en-US" sz="1200" dirty="0"/>
+          </a:p>
+        </p:txBody>
+      </p:sp>
+      <p:sp>
+        <p:nvSpPr>
+          <p:cNvPr id="39" name="Slide Number Placeholder 0"/>
           <p:cNvSpPr>
             <a:spLocks noGrp="1"/>
           </p:cNvSpPr>
@@ -12905,7 +13161,7 @@
                                           </p:stCondLst>
                                         </p:cTn>
                                         <p:tgtEl>
-                                          <p:spTgt spid="7"/>
+                                          <p:spTgt spid="9"/>
                                         </p:tgtEl>
                                         <p:attrNameLst>
                                           <p:attrName>style.visibility</p:attrName>
@@ -12932,7 +13188,7 @@
                                           </p:stCondLst>
                                         </p:cTn>
                                         <p:tgtEl>
-                                          <p:spTgt spid="8"/>
+                                          <p:spTgt spid="10"/>
                                         </p:tgtEl>
                                         <p:attrNameLst>
                                           <p:attrName>style.visibility</p:attrName>
@@ -12977,7 +13233,7 @@
                                           </p:stCondLst>
                                         </p:cTn>
                                         <p:tgtEl>
-                                          <p:spTgt spid="12"/>
+                                          <p:spTgt spid="16"/>
                                         </p:tgtEl>
                                         <p:attrNameLst>
                                           <p:attrName>style.visibility</p:attrName>
@@ -13004,7 +13260,7 @@
                                           </p:stCondLst>
                                         </p:cTn>
                                         <p:tgtEl>
-                                          <p:spTgt spid="13"/>
+                                          <p:spTgt spid="17"/>
                                         </p:tgtEl>
                                         <p:attrNameLst>
                                           <p:attrName>style.visibility</p:attrName>
@@ -13049,7 +13305,7 @@
                                           </p:stCondLst>
                                         </p:cTn>
                                         <p:tgtEl>
-                                          <p:spTgt spid="17"/>
+                                          <p:spTgt spid="23"/>
                                         </p:tgtEl>
                                         <p:attrNameLst>
                                           <p:attrName>style.visibility</p:attrName>
@@ -13076,7 +13332,7 @@
                                           </p:stCondLst>
                                         </p:cTn>
                                         <p:tgtEl>
-                                          <p:spTgt spid="18"/>
+                                          <p:spTgt spid="24"/>
                                         </p:tgtEl>
                                         <p:attrNameLst>
                                           <p:attrName>style.visibility</p:attrName>
@@ -13121,7 +13377,7 @@
                                           </p:stCondLst>
                                         </p:cTn>
                                         <p:tgtEl>
-                                          <p:spTgt spid="22"/>
+                                          <p:spTgt spid="30"/>
                                         </p:tgtEl>
                                         <p:attrNameLst>
                                           <p:attrName>style.visibility</p:attrName>
@@ -13148,7 +13404,7 @@
                                           </p:stCondLst>
                                         </p:cTn>
                                         <p:tgtEl>
-                                          <p:spTgt spid="23"/>
+                                          <p:spTgt spid="31"/>
                                         </p:tgtEl>
                                         <p:attrNameLst>
                                           <p:attrName>style.visibility</p:attrName>
@@ -13193,7 +13449,7 @@
                                           </p:stCondLst>
                                         </p:cTn>
                                         <p:tgtEl>
-                                          <p:spTgt spid="27"/>
+                                          <p:spTgt spid="37"/>
                                         </p:tgtEl>
                                         <p:attrNameLst>
                                           <p:attrName>style.visibility</p:attrName>
@@ -13220,7 +13476,7 @@
                                           </p:stCondLst>
                                         </p:cTn>
                                         <p:tgtEl>
-                                          <p:spTgt spid="28"/>
+                                          <p:spTgt spid="38"/>
                                         </p:tgtEl>
                                         <p:attrNameLst>
                                           <p:attrName>style.visibility</p:attrName>
@@ -13261,11 +13517,11 @@
       </p:par>
     </p:tnLst>
     <p:bldLst>
-      <p:bldP spid="8" grpId="0" animBg="1"/>
-      <p:bldP spid="13" grpId="0" animBg="1"/>
-      <p:bldP spid="18" grpId="0" animBg="1"/>
-      <p:bldP spid="23" grpId="0" animBg="1"/>
-      <p:bldP spid="28" grpId="0" animBg="1"/>
+      <p:bldP spid="10" grpId="0" animBg="1"/>
+      <p:bldP spid="17" grpId="0" animBg="1"/>
+      <p:bldP spid="24" grpId="0" animBg="1"/>
+      <p:bldP spid="31" grpId="0" animBg="1"/>
+      <p:bldP spid="38" grpId="0" animBg="1"/>
     </p:bldLst>
   </p:timing>
 </p:sld>
@@ -13853,7 +14109,7 @@
         <p:spPr>
           <a:xfrm>
             <a:off x="548640" y="1325880"/>
-            <a:ext cx="11064240" cy="457200"/>
+            <a:ext cx="11091672" cy="457200"/>
           </a:xfrm>
           <a:prstGeom prst="rect">
             <a:avLst/>
@@ -13891,7 +14147,7 @@
           <p:nvPr>
             <p:extLst>
               <p:ext uri="{D42A27DB-BD31-4B8C-83A1-F6EECF244321}">
-                <p14:modId xmlns:p14="http://schemas.microsoft.com/office/powerpoint/2010/main" val="552335608"/>
+                <p14:modId xmlns:p14="http://schemas.microsoft.com/office/powerpoint/2010/main" val="826899986"/>
               </p:ext>
             </p:extLst>
           </p:nvPr>
@@ -15528,7 +15784,7 @@
               <a:buChar char="•"/>
             </a:pPr>
             <a:r>
-              <a:rPr lang="ko-KR" altLang="en-US" sz="2400" dirty="0">
+              <a:rPr lang="ko-KR" altLang="en-US" sz="2800" dirty="0">
                 <a:solidFill>
                   <a:srgbClr val="14142B"/>
                 </a:solidFill>
@@ -15539,7 +15795,7 @@
               <a:t>책상 위에 </a:t>
             </a:r>
             <a:r>
-              <a:rPr lang="en-US" sz="2400" dirty="0">
+              <a:rPr lang="en-US" sz="2800" dirty="0">
                 <a:solidFill>
                   <a:srgbClr val="14142B"/>
                 </a:solidFill>
@@ -15547,7 +15803,7 @@
               <a:t>· la posición lleva </a:t>
             </a:r>
             <a:r>
-              <a:rPr lang="ko-KR" altLang="en-US" sz="2400" dirty="0">
+              <a:rPr lang="ko-KR" altLang="en-US" sz="2800" dirty="0">
                 <a:solidFill>
                   <a:srgbClr val="14142B"/>
                 </a:solidFill>
@@ -15557,7 +15813,7 @@
               </a:rPr>
               <a:t>에</a:t>
             </a:r>
-            <a:endParaRPr lang="en-US" sz="2400" dirty="0"/>
+            <a:endParaRPr lang="en-US" sz="2800" dirty="0"/>
           </a:p>
           <a:p>
             <a:pPr marL="228600" indent="-228600" eaLnBrk="1">
@@ -15568,7 +15824,7 @@
               <a:buChar char="•"/>
             </a:pPr>
             <a:r>
-              <a:rPr lang="ko-KR" altLang="en-US" sz="2400" dirty="0">
+              <a:rPr lang="ko-KR" altLang="en-US" sz="2800" dirty="0">
                 <a:solidFill>
                   <a:srgbClr val="14142B"/>
                 </a:solidFill>
@@ -15579,7 +15835,7 @@
               <a:t>커피가 컴퓨터 옆에 있어요</a:t>
             </a:r>
             <a:r>
-              <a:rPr lang="en-US" sz="2400" dirty="0">
+              <a:rPr lang="en-US" sz="2800" dirty="0">
                 <a:solidFill>
                   <a:srgbClr val="14142B"/>
                 </a:solidFill>
@@ -15587,7 +15843,7 @@
               <a:t>. · ¿termina en </a:t>
             </a:r>
             <a:r>
-              <a:rPr lang="ko-KR" altLang="en-US" sz="2400" dirty="0">
+              <a:rPr lang="ko-KR" altLang="en-US" sz="2800" dirty="0">
                 <a:solidFill>
                   <a:srgbClr val="14142B"/>
                 </a:solidFill>
@@ -15598,7 +15854,7 @@
               <a:t>받침</a:t>
             </a:r>
             <a:r>
-              <a:rPr lang="en-US" sz="2400" dirty="0">
+              <a:rPr lang="en-US" sz="2800" dirty="0">
                 <a:solidFill>
                   <a:srgbClr val="14142B"/>
                 </a:solidFill>
@@ -15606,7 +15862,7 @@
               <a:t>? No → </a:t>
             </a:r>
             <a:r>
-              <a:rPr lang="ko-KR" altLang="en-US" sz="2400" dirty="0">
+              <a:rPr lang="ko-KR" altLang="en-US" sz="2800" dirty="0">
                 <a:solidFill>
                   <a:srgbClr val="14142B"/>
                 </a:solidFill>
@@ -15616,7 +15872,7 @@
               </a:rPr>
               <a:t>가</a:t>
             </a:r>
-            <a:endParaRPr lang="en-US" sz="2400" dirty="0"/>
+            <a:endParaRPr lang="en-US" sz="2800" dirty="0"/>
           </a:p>
           <a:p>
             <a:pPr marL="228600" indent="-228600" eaLnBrk="1">
@@ -15627,7 +15883,7 @@
               <a:buChar char="•"/>
             </a:pPr>
             <a:r>
-              <a:rPr lang="ko-KR" altLang="en-US" sz="2400" dirty="0">
+              <a:rPr lang="ko-KR" altLang="en-US" sz="2800" dirty="0">
                 <a:solidFill>
                   <a:srgbClr val="14142B"/>
                 </a:solidFill>
@@ -15638,7 +15894,7 @@
               <a:t>책이 책상 위에 있어요</a:t>
             </a:r>
             <a:r>
-              <a:rPr lang="en-US" sz="2400" dirty="0">
+              <a:rPr lang="en-US" sz="2800" dirty="0">
                 <a:solidFill>
                   <a:srgbClr val="14142B"/>
                 </a:solidFill>
@@ -15646,7 +15902,7 @@
               <a:t>. · </a:t>
             </a:r>
             <a:r>
-              <a:rPr lang="ko-KR" altLang="en-US" sz="2400" dirty="0">
+              <a:rPr lang="ko-KR" altLang="en-US" sz="2800" dirty="0">
                 <a:solidFill>
                   <a:srgbClr val="14142B"/>
                 </a:solidFill>
@@ -15657,14 +15913,14 @@
               <a:t>있어요</a:t>
             </a:r>
             <a:r>
-              <a:rPr lang="en-US" sz="2400" dirty="0">
+              <a:rPr lang="en-US" sz="2800" dirty="0">
                 <a:solidFill>
                   <a:srgbClr val="14142B"/>
                 </a:solidFill>
               </a:rPr>
               <a:t>, siempre al final</a:t>
             </a:r>
-            <a:endParaRPr lang="en-US" sz="2400" dirty="0"/>
+            <a:endParaRPr lang="en-US" sz="2800" dirty="0"/>
           </a:p>
         </p:txBody>
       </p:sp>
@@ -15849,7 +16105,7 @@
           <p:nvPr>
             <p:extLst>
               <p:ext uri="{D42A27DB-BD31-4B8C-83A1-F6EECF244321}">
-                <p14:modId xmlns:p14="http://schemas.microsoft.com/office/powerpoint/2010/main" val="1022542533"/>
+                <p14:modId xmlns:p14="http://schemas.microsoft.com/office/powerpoint/2010/main" val="3037395100"/>
               </p:ext>
             </p:extLst>
           </p:nvPr>
@@ -17220,16 +17476,40 @@
           </a:p>
         </p:txBody>
       </p:sp>
-      <p:sp>
-        <p:nvSpPr>
-          <p:cNvPr id="3" name="Text 1"/>
+      <p:pic>
+        <p:nvPicPr>
+          <p:cNvPr id="3" name="imagen" descr="C:\Users\Chingu\AppData\Local\Temp\claude\C--Users-Chingu-Desktop-ACADEMIASEULWEB\d4111e1b-5523-44ea-97b2-b1a1d9545b9e\scratchpad\decks\cache\img_1bc2374c382cc4b1.png"/>
+          <p:cNvPicPr>
+            <a:picLocks noChangeAspect="1"/>
+          </p:cNvPicPr>
+          <p:nvPr/>
+        </p:nvPicPr>
+        <p:blipFill>
+          <a:blip r:embed="rId3"/>
+          <a:stretch>
+            <a:fillRect/>
+          </a:stretch>
+        </p:blipFill>
+        <p:spPr>
+          <a:xfrm>
+            <a:off x="7754112" y="1508760"/>
+            <a:ext cx="3886200" cy="4480560"/>
+          </a:xfrm>
+          <a:prstGeom prst="rect">
+            <a:avLst/>
+          </a:prstGeom>
+        </p:spPr>
+      </p:pic>
+      <p:sp>
+        <p:nvSpPr>
+          <p:cNvPr id="4" name="Text 1"/>
           <p:cNvSpPr txBox="1"/>
           <p:nvPr/>
         </p:nvSpPr>
         <p:spPr>
           <a:xfrm>
             <a:off x="548640" y="1325880"/>
-            <a:ext cx="11064240" cy="548640"/>
+            <a:ext cx="6931152" cy="548640"/>
           </a:xfrm>
           <a:prstGeom prst="rect">
             <a:avLst/>
@@ -17260,13 +17540,13 @@
       </p:sp>
       <p:sp>
         <p:nvSpPr>
-          <p:cNvPr id="4" name="num_0"/>
+          <p:cNvPr id="5" name="num_0"/>
           <p:cNvSpPr/>
           <p:nvPr/>
         </p:nvSpPr>
         <p:spPr>
           <a:xfrm>
-            <a:off x="548640" y="2171700"/>
+            <a:off x="548640" y="2574950"/>
             <a:ext cx="457200" cy="457200"/>
           </a:xfrm>
           <a:prstGeom prst="ellipse">
@@ -17285,13 +17565,13 @@
       </p:sp>
       <p:sp>
         <p:nvSpPr>
-          <p:cNvPr id="5" name="Text 3"/>
+          <p:cNvPr id="6" name="Text 3"/>
           <p:cNvSpPr txBox="1"/>
           <p:nvPr/>
         </p:nvSpPr>
         <p:spPr>
           <a:xfrm>
-            <a:off x="548640" y="2171700"/>
+            <a:off x="548640" y="2574950"/>
             <a:ext cx="457200" cy="457200"/>
           </a:xfrm>
           <a:prstGeom prst="rect">
@@ -17323,14 +17603,14 @@
       </p:sp>
       <p:sp>
         <p:nvSpPr>
-          <p:cNvPr id="6" name="Text 4"/>
+          <p:cNvPr id="7" name="Text 4"/>
           <p:cNvSpPr txBox="1"/>
           <p:nvPr/>
         </p:nvSpPr>
         <p:spPr>
           <a:xfrm>
-            <a:off x="1188720" y="1965960"/>
-            <a:ext cx="5285232" cy="868680"/>
+            <a:off x="1188720" y="2369210"/>
+            <a:ext cx="2735519" cy="868680"/>
           </a:xfrm>
           <a:prstGeom prst="rect">
             <a:avLst/>
@@ -17372,14 +17652,14 @@
       </p:sp>
       <p:sp>
         <p:nvSpPr>
-          <p:cNvPr id="7" name="rev_21_caja"/>
+          <p:cNvPr id="8" name="rev_21_caja"/>
           <p:cNvSpPr/>
           <p:nvPr/>
         </p:nvSpPr>
         <p:spPr>
           <a:xfrm>
-            <a:off x="6702552" y="2002536"/>
-            <a:ext cx="4937760" cy="795528"/>
+            <a:off x="4152839" y="2405786"/>
+            <a:ext cx="3326953" cy="795528"/>
           </a:xfrm>
           <a:prstGeom prst="roundRect">
             <a:avLst>
@@ -17399,14 +17679,14 @@
       </p:sp>
       <p:sp>
         <p:nvSpPr>
-          <p:cNvPr id="8" name="rev_21_txt"/>
+          <p:cNvPr id="9" name="rev_21_txt"/>
           <p:cNvSpPr txBox="1"/>
           <p:nvPr/>
         </p:nvSpPr>
         <p:spPr>
           <a:xfrm>
-            <a:off x="6793992" y="2002536"/>
-            <a:ext cx="4754880" cy="795528"/>
+            <a:off x="4244279" y="2405786"/>
+            <a:ext cx="3144073" cy="795528"/>
           </a:xfrm>
           <a:prstGeom prst="rect">
             <a:avLst/>
@@ -17448,13 +17728,13 @@
       </p:sp>
       <p:sp>
         <p:nvSpPr>
-          <p:cNvPr id="9" name="num_1"/>
+          <p:cNvPr id="10" name="num_1"/>
           <p:cNvSpPr/>
           <p:nvPr/>
         </p:nvSpPr>
         <p:spPr>
           <a:xfrm>
-            <a:off x="548640" y="3168396"/>
+            <a:off x="548640" y="3571646"/>
             <a:ext cx="457200" cy="457200"/>
           </a:xfrm>
           <a:prstGeom prst="ellipse">
@@ -17473,13 +17753,13 @@
       </p:sp>
       <p:sp>
         <p:nvSpPr>
-          <p:cNvPr id="10" name="Text 8"/>
+          <p:cNvPr id="11" name="Text 8"/>
           <p:cNvSpPr txBox="1"/>
           <p:nvPr/>
         </p:nvSpPr>
         <p:spPr>
           <a:xfrm>
-            <a:off x="548640" y="3168396"/>
+            <a:off x="548640" y="3571646"/>
             <a:ext cx="457200" cy="457200"/>
           </a:xfrm>
           <a:prstGeom prst="rect">
@@ -17511,14 +17791,14 @@
       </p:sp>
       <p:sp>
         <p:nvSpPr>
-          <p:cNvPr id="11" name="Text 9"/>
+          <p:cNvPr id="12" name="Text 9"/>
           <p:cNvSpPr txBox="1"/>
           <p:nvPr/>
         </p:nvSpPr>
         <p:spPr>
           <a:xfrm>
-            <a:off x="1188720" y="2962656"/>
-            <a:ext cx="5285232" cy="868680"/>
+            <a:off x="1188720" y="3365906"/>
+            <a:ext cx="2735519" cy="868680"/>
           </a:xfrm>
           <a:prstGeom prst="rect">
             <a:avLst/>
@@ -17560,14 +17840,14 @@
       </p:sp>
       <p:sp>
         <p:nvSpPr>
-          <p:cNvPr id="12" name="rev_22_caja"/>
+          <p:cNvPr id="13" name="rev_22_caja"/>
           <p:cNvSpPr/>
           <p:nvPr/>
         </p:nvSpPr>
         <p:spPr>
           <a:xfrm>
-            <a:off x="6702552" y="2999232"/>
-            <a:ext cx="4937760" cy="795528"/>
+            <a:off x="4152839" y="3402482"/>
+            <a:ext cx="3326953" cy="795528"/>
           </a:xfrm>
           <a:prstGeom prst="roundRect">
             <a:avLst>
@@ -17587,14 +17867,14 @@
       </p:sp>
       <p:sp>
         <p:nvSpPr>
-          <p:cNvPr id="13" name="rev_22_txt"/>
+          <p:cNvPr id="14" name="rev_22_txt"/>
           <p:cNvSpPr txBox="1"/>
           <p:nvPr/>
         </p:nvSpPr>
         <p:spPr>
           <a:xfrm>
-            <a:off x="6793992" y="2999232"/>
-            <a:ext cx="4754880" cy="795528"/>
+            <a:off x="4244279" y="3402482"/>
+            <a:ext cx="3144073" cy="795528"/>
           </a:xfrm>
           <a:prstGeom prst="rect">
             <a:avLst/>
@@ -17636,13 +17916,13 @@
       </p:sp>
       <p:sp>
         <p:nvSpPr>
-          <p:cNvPr id="14" name="num_2"/>
+          <p:cNvPr id="15" name="num_2"/>
           <p:cNvSpPr/>
           <p:nvPr/>
         </p:nvSpPr>
         <p:spPr>
           <a:xfrm>
-            <a:off x="548640" y="4165092"/>
+            <a:off x="548640" y="4568342"/>
             <a:ext cx="457200" cy="457200"/>
           </a:xfrm>
           <a:prstGeom prst="ellipse">
@@ -17661,13 +17941,13 @@
       </p:sp>
       <p:sp>
         <p:nvSpPr>
-          <p:cNvPr id="15" name="Text 13"/>
+          <p:cNvPr id="16" name="Text 13"/>
           <p:cNvSpPr txBox="1"/>
           <p:nvPr/>
         </p:nvSpPr>
         <p:spPr>
           <a:xfrm>
-            <a:off x="548640" y="4165092"/>
+            <a:off x="548640" y="4568342"/>
             <a:ext cx="457200" cy="457200"/>
           </a:xfrm>
           <a:prstGeom prst="rect">
@@ -17699,14 +17979,14 @@
       </p:sp>
       <p:sp>
         <p:nvSpPr>
-          <p:cNvPr id="16" name="Text 14"/>
+          <p:cNvPr id="17" name="Text 14"/>
           <p:cNvSpPr txBox="1"/>
           <p:nvPr/>
         </p:nvSpPr>
         <p:spPr>
           <a:xfrm>
-            <a:off x="1188720" y="3959352"/>
-            <a:ext cx="5285232" cy="868680"/>
+            <a:off x="1188720" y="4362602"/>
+            <a:ext cx="2735519" cy="868680"/>
           </a:xfrm>
           <a:prstGeom prst="rect">
             <a:avLst/>
@@ -17748,14 +18028,14 @@
       </p:sp>
       <p:sp>
         <p:nvSpPr>
-          <p:cNvPr id="17" name="rev_23_caja"/>
+          <p:cNvPr id="18" name="rev_23_caja"/>
           <p:cNvSpPr/>
           <p:nvPr/>
         </p:nvSpPr>
         <p:spPr>
           <a:xfrm>
-            <a:off x="6702552" y="3995928"/>
-            <a:ext cx="4937760" cy="795528"/>
+            <a:off x="4152839" y="4399178"/>
+            <a:ext cx="3326953" cy="795528"/>
           </a:xfrm>
           <a:prstGeom prst="roundRect">
             <a:avLst>
@@ -17775,14 +18055,14 @@
       </p:sp>
       <p:sp>
         <p:nvSpPr>
-          <p:cNvPr id="18" name="rev_23_txt"/>
+          <p:cNvPr id="19" name="rev_23_txt"/>
           <p:cNvSpPr txBox="1"/>
           <p:nvPr/>
         </p:nvSpPr>
         <p:spPr>
           <a:xfrm>
-            <a:off x="6793992" y="3995928"/>
-            <a:ext cx="4754880" cy="795528"/>
+            <a:off x="4244279" y="4399178"/>
+            <a:ext cx="3144073" cy="795528"/>
           </a:xfrm>
           <a:prstGeom prst="rect">
             <a:avLst/>
@@ -17800,7 +18080,7 @@
               <a:buNone/>
             </a:pPr>
             <a:r>
-              <a:rPr lang="ko-KR" altLang="en-US" sz="2200" b="1" dirty="0">
+              <a:rPr lang="ko-KR" altLang="en-US" sz="1900" b="1" dirty="0">
                 <a:solidFill>
                   <a:srgbClr val="FFFFFF"/>
                 </a:solidFill>
@@ -17811,7 +18091,7 @@
               <a:t>B: 안경이 가방 안에 없어요</a:t>
             </a:r>
             <a:r>
-              <a:rPr lang="en-US" sz="2200" b="1" dirty="0">
+              <a:rPr lang="en-US" sz="1900" b="1" dirty="0">
                 <a:solidFill>
                   <a:srgbClr val="FFFFFF"/>
                 </a:solidFill>
@@ -17819,7 +18099,7 @@
               <a:t>. </a:t>
             </a:r>
             <a:r>
-              <a:rPr lang="ko-KR" altLang="en-US" sz="2200" b="1" dirty="0">
+              <a:rPr lang="ko-KR" altLang="en-US" sz="1900" b="1" dirty="0">
                 <a:solidFill>
                   <a:srgbClr val="FFFFFF"/>
                 </a:solidFill>
@@ -17830,14 +18110,14 @@
               <a:t>컴퓨터 옆에 있어요</a:t>
             </a:r>
             <a:r>
-              <a:rPr lang="en-US" sz="2200" b="1" dirty="0">
+              <a:rPr lang="en-US" sz="1900" b="1" dirty="0">
                 <a:solidFill>
                   <a:srgbClr val="FFFFFF"/>
                 </a:solidFill>
               </a:rPr>
               <a:t>!</a:t>
             </a:r>
-            <a:endParaRPr lang="en-US" sz="2200" dirty="0"/>
+            <a:endParaRPr lang="en-US" sz="1900" dirty="0"/>
           </a:p>
         </p:txBody>
       </p:sp>
@@ -17928,7 +18208,7 @@
                                           </p:stCondLst>
                                         </p:cTn>
                                         <p:tgtEl>
-                                          <p:spTgt spid="7"/>
+                                          <p:spTgt spid="8"/>
                                         </p:tgtEl>
                                         <p:attrNameLst>
                                           <p:attrName>style.visibility</p:attrName>
@@ -17955,7 +18235,7 @@
                                           </p:stCondLst>
                                         </p:cTn>
                                         <p:tgtEl>
-                                          <p:spTgt spid="8"/>
+                                          <p:spTgt spid="9"/>
                                         </p:tgtEl>
                                         <p:attrNameLst>
                                           <p:attrName>style.visibility</p:attrName>
@@ -18000,7 +18280,7 @@
                                           </p:stCondLst>
                                         </p:cTn>
                                         <p:tgtEl>
-                                          <p:spTgt spid="12"/>
+                                          <p:spTgt spid="13"/>
                                         </p:tgtEl>
                                         <p:attrNameLst>
                                           <p:attrName>style.visibility</p:attrName>
@@ -18027,7 +18307,7 @@
                                           </p:stCondLst>
                                         </p:cTn>
                                         <p:tgtEl>
-                                          <p:spTgt spid="13"/>
+                                          <p:spTgt spid="14"/>
                                         </p:tgtEl>
                                         <p:attrNameLst>
                                           <p:attrName>style.visibility</p:attrName>
@@ -18072,7 +18352,7 @@
                                           </p:stCondLst>
                                         </p:cTn>
                                         <p:tgtEl>
-                                          <p:spTgt spid="17"/>
+                                          <p:spTgt spid="18"/>
                                         </p:tgtEl>
                                         <p:attrNameLst>
                                           <p:attrName>style.visibility</p:attrName>
@@ -18099,7 +18379,7 @@
                                           </p:stCondLst>
                                         </p:cTn>
                                         <p:tgtEl>
-                                          <p:spTgt spid="18"/>
+                                          <p:spTgt spid="19"/>
                                         </p:tgtEl>
                                         <p:attrNameLst>
                                           <p:attrName>style.visibility</p:attrName>
@@ -18140,9 +18420,9 @@
       </p:par>
     </p:tnLst>
     <p:bldLst>
-      <p:bldP spid="8" grpId="0" animBg="1"/>
-      <p:bldP spid="13" grpId="0" animBg="1"/>
-      <p:bldP spid="18" grpId="0" animBg="1"/>
+      <p:bldP spid="9" grpId="0" animBg="1"/>
+      <p:bldP spid="14" grpId="0" animBg="1"/>
+      <p:bldP spid="19" grpId="0" animBg="1"/>
     </p:bldLst>
   </p:timing>
 </p:sld>
@@ -18232,16 +18512,40 @@
           </a:p>
         </p:txBody>
       </p:sp>
-      <p:sp>
-        <p:nvSpPr>
-          <p:cNvPr id="3" name="panel"/>
+      <p:pic>
+        <p:nvPicPr>
+          <p:cNvPr id="3" name="imagen" descr="C:\Users\Chingu\AppData\Local\Temp\claude\C--Users-Chingu-Desktop-ACADEMIASEULWEB\d4111e1b-5523-44ea-97b2-b1a1d9545b9e\scratchpad\decks\cache\img_467489cd07922317.png"/>
+          <p:cNvPicPr>
+            <a:picLocks noChangeAspect="1"/>
+          </p:cNvPicPr>
+          <p:nvPr/>
+        </p:nvPicPr>
+        <p:blipFill>
+          <a:blip r:embed="rId3"/>
+          <a:stretch>
+            <a:fillRect/>
+          </a:stretch>
+        </p:blipFill>
+        <p:spPr>
+          <a:xfrm>
+            <a:off x="7754112" y="1508760"/>
+            <a:ext cx="3886200" cy="4480560"/>
+          </a:xfrm>
+          <a:prstGeom prst="rect">
+            <a:avLst/>
+          </a:prstGeom>
+        </p:spPr>
+      </p:pic>
+      <p:sp>
+        <p:nvSpPr>
+          <p:cNvPr id="4" name="panel"/>
           <p:cNvSpPr/>
           <p:nvPr/>
         </p:nvSpPr>
         <p:spPr>
           <a:xfrm>
-            <a:off x="1280160" y="1645920"/>
-            <a:ext cx="9628632" cy="3108960"/>
+            <a:off x="548640" y="1645920"/>
+            <a:ext cx="6931152" cy="3108960"/>
           </a:xfrm>
           <a:prstGeom prst="roundRect">
             <a:avLst>
@@ -18261,14 +18565,14 @@
       </p:sp>
       <p:sp>
         <p:nvSpPr>
-          <p:cNvPr id="4" name="frase_ko"/>
+          <p:cNvPr id="5" name="frase_ko"/>
           <p:cNvSpPr txBox="1"/>
           <p:nvPr/>
         </p:nvSpPr>
         <p:spPr>
           <a:xfrm>
-            <a:off x="1463040" y="1828800"/>
-            <a:ext cx="9262872" cy="1828800"/>
+            <a:off x="731520" y="1828800"/>
+            <a:ext cx="6565392" cy="1828800"/>
           </a:xfrm>
           <a:prstGeom prst="rect">
             <a:avLst/>
@@ -18335,14 +18639,14 @@
       </p:sp>
       <p:sp>
         <p:nvSpPr>
-          <p:cNvPr id="5" name="Text 3"/>
+          <p:cNvPr id="6" name="Text 3"/>
           <p:cNvSpPr txBox="1"/>
           <p:nvPr/>
         </p:nvSpPr>
         <p:spPr>
           <a:xfrm>
-            <a:off x="1463040" y="3657600"/>
-            <a:ext cx="9262872" cy="822960"/>
+            <a:off x="1051560" y="3657600"/>
+            <a:ext cx="5742432" cy="822960"/>
           </a:xfrm>
           <a:prstGeom prst="rect">
             <a:avLst/>
@@ -18373,14 +18677,14 @@
       </p:sp>
       <p:sp>
         <p:nvSpPr>
-          <p:cNvPr id="6" name="lista"/>
+          <p:cNvPr id="7" name="lista"/>
           <p:cNvSpPr txBox="1"/>
           <p:nvPr/>
         </p:nvSpPr>
         <p:spPr>
           <a:xfrm>
-            <a:off x="1280160" y="4937760"/>
-            <a:ext cx="9628632" cy="1234440"/>
+            <a:off x="548640" y="4937760"/>
+            <a:ext cx="6931152" cy="1234440"/>
           </a:xfrm>
           <a:prstGeom prst="rect">
             <a:avLst/>
@@ -18622,7 +18926,7 @@
           <p:nvPr>
             <p:extLst>
               <p:ext uri="{D42A27DB-BD31-4B8C-83A1-F6EECF244321}">
-                <p14:modId xmlns:p14="http://schemas.microsoft.com/office/powerpoint/2010/main" val="4267844175"/>
+                <p14:modId xmlns:p14="http://schemas.microsoft.com/office/powerpoint/2010/main" val="1586659074"/>
               </p:ext>
             </p:extLst>
           </p:nvPr>
@@ -19723,8 +20027,8 @@
         </p:blipFill>
         <p:spPr>
           <a:xfrm>
-            <a:off x="1836191" y="1435608"/>
-            <a:ext cx="969721" cy="969721"/>
+            <a:off x="1766926" y="1435608"/>
+            <a:ext cx="1108253" cy="1108253"/>
           </a:xfrm>
           <a:prstGeom prst="rect">
             <a:avLst/>
@@ -19739,8 +20043,8 @@
         </p:nvSpPr>
         <p:spPr>
           <a:xfrm>
-            <a:off x="548640" y="2423617"/>
-            <a:ext cx="3544824" cy="507949"/>
+            <a:off x="548640" y="2562149"/>
+            <a:ext cx="3544824" cy="461772"/>
           </a:xfrm>
           <a:prstGeom prst="rect">
             <a:avLst/>
@@ -19758,7 +20062,7 @@
               <a:buNone/>
             </a:pPr>
             <a:r>
-              <a:rPr lang="ko-KR" altLang="en-US" sz="3100" b="1" dirty="0">
+              <a:rPr lang="ko-KR" altLang="en-US" sz="2900" b="1" dirty="0">
                 <a:solidFill>
                   <a:srgbClr val="4236F6"/>
                 </a:solidFill>
@@ -19768,7 +20072,7 @@
               </a:rPr>
               <a:t>집</a:t>
             </a:r>
-            <a:endParaRPr lang="en-US" sz="3100" dirty="0"/>
+            <a:endParaRPr lang="en-US" sz="2900" dirty="0"/>
           </a:p>
         </p:txBody>
       </p:sp>
@@ -19780,8 +20084,8 @@
         </p:nvSpPr>
         <p:spPr>
           <a:xfrm>
-            <a:off x="621792" y="2931566"/>
-            <a:ext cx="3398520" cy="291694"/>
+            <a:off x="621792" y="3023921"/>
+            <a:ext cx="3398520" cy="537667"/>
           </a:xfrm>
           <a:prstGeom prst="rect">
             <a:avLst/>
@@ -19835,8 +20139,8 @@
         </p:blipFill>
         <p:spPr>
           <a:xfrm>
-            <a:off x="3654552" y="3214116"/>
-            <a:ext cx="329184" cy="329184"/>
+            <a:off x="3691128" y="1399032"/>
+            <a:ext cx="310896" cy="310896"/>
           </a:xfrm>
           <a:prstGeom prst="rect">
             <a:avLst/>
@@ -19893,8 +20197,8 @@
         </p:blipFill>
         <p:spPr>
           <a:xfrm>
-            <a:off x="5609615" y="1435608"/>
-            <a:ext cx="969721" cy="969721"/>
+            <a:off x="5540350" y="1435608"/>
+            <a:ext cx="1108253" cy="1108253"/>
           </a:xfrm>
           <a:prstGeom prst="rect">
             <a:avLst/>
@@ -19909,8 +20213,8 @@
         </p:nvSpPr>
         <p:spPr>
           <a:xfrm>
-            <a:off x="4322064" y="2423617"/>
-            <a:ext cx="3544824" cy="507949"/>
+            <a:off x="4322064" y="2562149"/>
+            <a:ext cx="3544824" cy="461772"/>
           </a:xfrm>
           <a:prstGeom prst="rect">
             <a:avLst/>
@@ -19928,7 +20232,7 @@
               <a:buNone/>
             </a:pPr>
             <a:r>
-              <a:rPr lang="ko-KR" altLang="en-US" sz="3100" b="1" dirty="0">
+              <a:rPr lang="ko-KR" altLang="en-US" sz="2900" b="1" dirty="0">
                 <a:solidFill>
                   <a:srgbClr val="4236F6"/>
                 </a:solidFill>
@@ -19938,7 +20242,7 @@
               </a:rPr>
               <a:t>학교</a:t>
             </a:r>
-            <a:endParaRPr lang="en-US" sz="3100" dirty="0"/>
+            <a:endParaRPr lang="en-US" sz="2900" dirty="0"/>
           </a:p>
         </p:txBody>
       </p:sp>
@@ -19950,7 +20254,7 @@
         </p:nvSpPr>
         <p:spPr>
           <a:xfrm>
-            <a:off x="4322064" y="2931566"/>
+            <a:off x="4322064" y="3023921"/>
             <a:ext cx="3544824" cy="274320"/>
           </a:xfrm>
           <a:prstGeom prst="rect">
@@ -19999,7 +20303,7 @@
         </p:nvSpPr>
         <p:spPr>
           <a:xfrm>
-            <a:off x="4395216" y="3205886"/>
+            <a:off x="4395216" y="3298241"/>
             <a:ext cx="3398520" cy="274320"/>
           </a:xfrm>
           <a:prstGeom prst="rect">
@@ -20054,8 +20358,8 @@
         </p:blipFill>
         <p:spPr>
           <a:xfrm>
-            <a:off x="7427976" y="3214116"/>
-            <a:ext cx="329184" cy="329184"/>
+            <a:off x="7464552" y="1399032"/>
+            <a:ext cx="310896" cy="310896"/>
           </a:xfrm>
           <a:prstGeom prst="rect">
             <a:avLst/>
@@ -20112,8 +20416,8 @@
         </p:blipFill>
         <p:spPr>
           <a:xfrm>
-            <a:off x="9383039" y="1435608"/>
-            <a:ext cx="969721" cy="969721"/>
+            <a:off x="9313774" y="1435608"/>
+            <a:ext cx="1108253" cy="1108253"/>
           </a:xfrm>
           <a:prstGeom prst="rect">
             <a:avLst/>
@@ -20128,8 +20432,8 @@
         </p:nvSpPr>
         <p:spPr>
           <a:xfrm>
-            <a:off x="8095488" y="2423617"/>
-            <a:ext cx="3544824" cy="507949"/>
+            <a:off x="8095488" y="2562149"/>
+            <a:ext cx="3544824" cy="461772"/>
           </a:xfrm>
           <a:prstGeom prst="rect">
             <a:avLst/>
@@ -20147,7 +20451,7 @@
               <a:buNone/>
             </a:pPr>
             <a:r>
-              <a:rPr lang="ko-KR" altLang="en-US" sz="3100" b="1" dirty="0">
+              <a:rPr lang="ko-KR" altLang="en-US" sz="2900" b="1" dirty="0">
                 <a:solidFill>
                   <a:srgbClr val="4236F6"/>
                 </a:solidFill>
@@ -20157,7 +20461,7 @@
               </a:rPr>
               <a:t>회사</a:t>
             </a:r>
-            <a:endParaRPr lang="en-US" sz="3100" dirty="0"/>
+            <a:endParaRPr lang="en-US" sz="2900" dirty="0"/>
           </a:p>
         </p:txBody>
       </p:sp>
@@ -20169,8 +20473,8 @@
         </p:nvSpPr>
         <p:spPr>
           <a:xfrm>
-            <a:off x="8168640" y="2931566"/>
-            <a:ext cx="3398520" cy="291694"/>
+            <a:off x="8168640" y="3023921"/>
+            <a:ext cx="3398520" cy="537667"/>
           </a:xfrm>
           <a:prstGeom prst="rect">
             <a:avLst/>
@@ -20224,8 +20528,8 @@
         </p:blipFill>
         <p:spPr>
           <a:xfrm>
-            <a:off x="11201400" y="3214116"/>
-            <a:ext cx="329184" cy="329184"/>
+            <a:off x="11237976" y="1399032"/>
+            <a:ext cx="310896" cy="310896"/>
           </a:xfrm>
           <a:prstGeom prst="rect">
             <a:avLst/>
@@ -20282,8 +20586,8 @@
         </p:blipFill>
         <p:spPr>
           <a:xfrm>
-            <a:off x="1836191" y="3973068"/>
-            <a:ext cx="969721" cy="969721"/>
+            <a:off x="1766926" y="3973068"/>
+            <a:ext cx="1108253" cy="1108253"/>
           </a:xfrm>
           <a:prstGeom prst="rect">
             <a:avLst/>
@@ -20298,8 +20602,8 @@
         </p:nvSpPr>
         <p:spPr>
           <a:xfrm>
-            <a:off x="548640" y="4961077"/>
-            <a:ext cx="3544824" cy="507949"/>
+            <a:off x="548640" y="5099609"/>
+            <a:ext cx="3544824" cy="461772"/>
           </a:xfrm>
           <a:prstGeom prst="rect">
             <a:avLst/>
@@ -20317,7 +20621,7 @@
               <a:buNone/>
             </a:pPr>
             <a:r>
-              <a:rPr lang="ko-KR" altLang="en-US" sz="3100" b="1" dirty="0">
+              <a:rPr lang="ko-KR" altLang="en-US" sz="2900" b="1" dirty="0">
                 <a:solidFill>
                   <a:srgbClr val="4236F6"/>
                 </a:solidFill>
@@ -20327,7 +20631,7 @@
               </a:rPr>
               <a:t>병원</a:t>
             </a:r>
-            <a:endParaRPr lang="en-US" sz="3100" dirty="0"/>
+            <a:endParaRPr lang="en-US" sz="2900" dirty="0"/>
           </a:p>
         </p:txBody>
       </p:sp>
@@ -20339,8 +20643,8 @@
         </p:nvSpPr>
         <p:spPr>
           <a:xfrm>
-            <a:off x="621792" y="5469026"/>
-            <a:ext cx="3398520" cy="291694"/>
+            <a:off x="621792" y="5561381"/>
+            <a:ext cx="3398520" cy="537667"/>
           </a:xfrm>
           <a:prstGeom prst="rect">
             <a:avLst/>
@@ -20394,8 +20698,8 @@
         </p:blipFill>
         <p:spPr>
           <a:xfrm>
-            <a:off x="3654552" y="5751576"/>
-            <a:ext cx="329184" cy="329184"/>
+            <a:off x="3691128" y="3936492"/>
+            <a:ext cx="310896" cy="310896"/>
           </a:xfrm>
           <a:prstGeom prst="rect">
             <a:avLst/>
@@ -20452,8 +20756,8 @@
         </p:blipFill>
         <p:spPr>
           <a:xfrm>
-            <a:off x="5609615" y="3973068"/>
-            <a:ext cx="969721" cy="969721"/>
+            <a:off x="5540350" y="3973068"/>
+            <a:ext cx="1108253" cy="1108253"/>
           </a:xfrm>
           <a:prstGeom prst="rect">
             <a:avLst/>
@@ -20468,8 +20772,8 @@
         </p:nvSpPr>
         <p:spPr>
           <a:xfrm>
-            <a:off x="4322064" y="4961077"/>
-            <a:ext cx="3544824" cy="507949"/>
+            <a:off x="4322064" y="5099609"/>
+            <a:ext cx="3544824" cy="461772"/>
           </a:xfrm>
           <a:prstGeom prst="rect">
             <a:avLst/>
@@ -20487,7 +20791,7 @@
               <a:buNone/>
             </a:pPr>
             <a:r>
-              <a:rPr lang="ko-KR" altLang="en-US" sz="3100" b="1" dirty="0">
+              <a:rPr lang="ko-KR" altLang="en-US" sz="2900" b="1" dirty="0">
                 <a:solidFill>
                   <a:srgbClr val="4236F6"/>
                 </a:solidFill>
@@ -20497,7 +20801,7 @@
               </a:rPr>
               <a:t>카페</a:t>
             </a:r>
-            <a:endParaRPr lang="en-US" sz="3100" dirty="0"/>
+            <a:endParaRPr lang="en-US" sz="2900" dirty="0"/>
           </a:p>
         </p:txBody>
       </p:sp>
@@ -20509,8 +20813,8 @@
         </p:nvSpPr>
         <p:spPr>
           <a:xfrm>
-            <a:off x="4395216" y="5469026"/>
-            <a:ext cx="3398520" cy="291694"/>
+            <a:off x="4395216" y="5561381"/>
+            <a:ext cx="3398520" cy="537667"/>
           </a:xfrm>
           <a:prstGeom prst="rect">
             <a:avLst/>
@@ -20564,8 +20868,8 @@
         </p:blipFill>
         <p:spPr>
           <a:xfrm>
-            <a:off x="7427976" y="5751576"/>
-            <a:ext cx="329184" cy="329184"/>
+            <a:off x="7464552" y="3936492"/>
+            <a:ext cx="310896" cy="310896"/>
           </a:xfrm>
           <a:prstGeom prst="rect">
             <a:avLst/>
@@ -20754,8 +21058,8 @@
         </p:blipFill>
         <p:spPr>
           <a:xfrm>
-            <a:off x="1133970" y="1435608"/>
-            <a:ext cx="1430807" cy="1430807"/>
+            <a:off x="1042919" y="1435608"/>
+            <a:ext cx="1612910" cy="1612910"/>
           </a:xfrm>
           <a:prstGeom prst="rect">
             <a:avLst/>
@@ -20770,8 +21074,8 @@
         </p:nvSpPr>
         <p:spPr>
           <a:xfrm>
-            <a:off x="548640" y="2884703"/>
-            <a:ext cx="2601468" cy="965606"/>
+            <a:off x="548640" y="3066806"/>
+            <a:ext cx="2601468" cy="877824"/>
           </a:xfrm>
           <a:prstGeom prst="rect">
             <a:avLst/>
@@ -20811,7 +21115,7 @@
         </p:nvSpPr>
         <p:spPr>
           <a:xfrm>
-            <a:off x="548640" y="3850310"/>
+            <a:off x="548640" y="3944630"/>
             <a:ext cx="2601468" cy="274320"/>
           </a:xfrm>
           <a:prstGeom prst="rect">
@@ -20860,8 +21164,8 @@
         </p:nvSpPr>
         <p:spPr>
           <a:xfrm>
-            <a:off x="621792" y="4124630"/>
-            <a:ext cx="2455164" cy="1178890"/>
+            <a:off x="621792" y="4218950"/>
+            <a:ext cx="2455164" cy="1422898"/>
           </a:xfrm>
           <a:prstGeom prst="rect">
             <a:avLst/>
@@ -20915,8 +21219,8 @@
         </p:blipFill>
         <p:spPr>
           <a:xfrm>
-            <a:off x="2711196" y="5294376"/>
-            <a:ext cx="329184" cy="329184"/>
+            <a:off x="2747772" y="1399032"/>
+            <a:ext cx="310896" cy="310896"/>
           </a:xfrm>
           <a:prstGeom prst="rect">
             <a:avLst/>
@@ -20973,8 +21277,8 @@
         </p:blipFill>
         <p:spPr>
           <a:xfrm>
-            <a:off x="3964038" y="1435608"/>
-            <a:ext cx="1430807" cy="1430807"/>
+            <a:off x="3872987" y="1435608"/>
+            <a:ext cx="1612910" cy="1612910"/>
           </a:xfrm>
           <a:prstGeom prst="rect">
             <a:avLst/>
@@ -20989,8 +21293,8 @@
         </p:nvSpPr>
         <p:spPr>
           <a:xfrm>
-            <a:off x="3378708" y="2884703"/>
-            <a:ext cx="2601468" cy="965606"/>
+            <a:off x="3378708" y="3066806"/>
+            <a:ext cx="2601468" cy="877824"/>
           </a:xfrm>
           <a:prstGeom prst="rect">
             <a:avLst/>
@@ -21030,8 +21334,8 @@
         </p:nvSpPr>
         <p:spPr>
           <a:xfrm>
-            <a:off x="3451860" y="3850310"/>
-            <a:ext cx="2455164" cy="1453210"/>
+            <a:off x="3451860" y="3944630"/>
+            <a:ext cx="2455164" cy="1697218"/>
           </a:xfrm>
           <a:prstGeom prst="rect">
             <a:avLst/>
@@ -21085,8 +21389,8 @@
         </p:blipFill>
         <p:spPr>
           <a:xfrm>
-            <a:off x="5541264" y="5294376"/>
-            <a:ext cx="329184" cy="329184"/>
+            <a:off x="5577840" y="1399032"/>
+            <a:ext cx="310896" cy="310896"/>
           </a:xfrm>
           <a:prstGeom prst="rect">
             <a:avLst/>
@@ -21143,8 +21447,8 @@
         </p:blipFill>
         <p:spPr>
           <a:xfrm>
-            <a:off x="6794106" y="1435608"/>
-            <a:ext cx="1430807" cy="1430807"/>
+            <a:off x="6703055" y="1435608"/>
+            <a:ext cx="1612910" cy="1612910"/>
           </a:xfrm>
           <a:prstGeom prst="rect">
             <a:avLst/>
@@ -21159,8 +21463,8 @@
         </p:nvSpPr>
         <p:spPr>
           <a:xfrm>
-            <a:off x="6208776" y="2884703"/>
-            <a:ext cx="2601468" cy="965606"/>
+            <a:off x="6208776" y="3066806"/>
+            <a:ext cx="2601468" cy="877824"/>
           </a:xfrm>
           <a:prstGeom prst="rect">
             <a:avLst/>
@@ -21200,8 +21504,8 @@
         </p:nvSpPr>
         <p:spPr>
           <a:xfrm>
-            <a:off x="6281928" y="3850310"/>
-            <a:ext cx="2455164" cy="1453210"/>
+            <a:off x="6281928" y="3944630"/>
+            <a:ext cx="2455164" cy="1697218"/>
           </a:xfrm>
           <a:prstGeom prst="rect">
             <a:avLst/>
@@ -21255,8 +21559,8 @@
         </p:blipFill>
         <p:spPr>
           <a:xfrm>
-            <a:off x="8371332" y="5294376"/>
-            <a:ext cx="329184" cy="329184"/>
+            <a:off x="8407908" y="1399032"/>
+            <a:ext cx="310896" cy="310896"/>
           </a:xfrm>
           <a:prstGeom prst="rect">
             <a:avLst/>
@@ -21313,8 +21617,8 @@
         </p:blipFill>
         <p:spPr>
           <a:xfrm>
-            <a:off x="9624174" y="1435608"/>
-            <a:ext cx="1430807" cy="1430807"/>
+            <a:off x="9533123" y="1435608"/>
+            <a:ext cx="1612910" cy="1612910"/>
           </a:xfrm>
           <a:prstGeom prst="rect">
             <a:avLst/>
@@ -21329,8 +21633,8 @@
         </p:nvSpPr>
         <p:spPr>
           <a:xfrm>
-            <a:off x="9038844" y="2884703"/>
-            <a:ext cx="2601468" cy="965606"/>
+            <a:off x="9038844" y="3066806"/>
+            <a:ext cx="2601468" cy="877824"/>
           </a:xfrm>
           <a:prstGeom prst="rect">
             <a:avLst/>
@@ -21370,8 +21674,8 @@
         </p:nvSpPr>
         <p:spPr>
           <a:xfrm>
-            <a:off x="9111996" y="3850310"/>
-            <a:ext cx="2455164" cy="1453210"/>
+            <a:off x="9111996" y="3944630"/>
+            <a:ext cx="2455164" cy="1697218"/>
           </a:xfrm>
           <a:prstGeom prst="rect">
             <a:avLst/>
@@ -21425,8 +21729,8 @@
         </p:blipFill>
         <p:spPr>
           <a:xfrm>
-            <a:off x="11201400" y="5294376"/>
-            <a:ext cx="329184" cy="329184"/>
+            <a:off x="11237976" y="1399032"/>
+            <a:ext cx="310896" cy="310896"/>
           </a:xfrm>
           <a:prstGeom prst="rect">
             <a:avLst/>
@@ -21612,7 +21916,7 @@
         <p:spPr>
           <a:xfrm>
             <a:off x="548640" y="1325880"/>
-            <a:ext cx="11064240" cy="457200"/>
+            <a:ext cx="11091672" cy="457200"/>
           </a:xfrm>
           <a:prstGeom prst="rect">
             <a:avLst/>
@@ -21717,15 +22021,39 @@
           </a:p>
         </p:txBody>
       </p:sp>
-      <p:sp>
-        <p:nvSpPr>
-          <p:cNvPr id="6" name="Text 4"/>
+      <p:pic>
+        <p:nvPicPr>
+          <p:cNvPr id="6" name="col_img_0" descr="C:\Users\Chingu\AppData\Local\Temp\claude\C--Users-Chingu-Desktop-ACADEMIASEULWEB\d4111e1b-5523-44ea-97b2-b1a1d9545b9e\scratchpad\decks\cache\img_2f9da15f99119eb4.png"/>
+          <p:cNvPicPr>
+            <a:picLocks noChangeAspect="1"/>
+          </p:cNvPicPr>
+          <p:nvPr/>
+        </p:nvPicPr>
+        <p:blipFill>
+          <a:blip r:embed="rId3"/>
+          <a:stretch>
+            <a:fillRect/>
+          </a:stretch>
+        </p:blipFill>
+        <p:spPr>
+          <a:xfrm>
+            <a:off x="777240" y="2651760"/>
+            <a:ext cx="3026664" cy="1375756"/>
+          </a:xfrm>
+          <a:prstGeom prst="rect">
+            <a:avLst/>
+          </a:prstGeom>
+        </p:spPr>
+      </p:pic>
+      <p:sp>
+        <p:nvSpPr>
+          <p:cNvPr id="7" name="Text 4"/>
           <p:cNvSpPr txBox="1"/>
           <p:nvPr/>
         </p:nvSpPr>
         <p:spPr>
           <a:xfrm>
-            <a:off x="777240" y="2651760"/>
+            <a:off x="777240" y="4118956"/>
             <a:ext cx="3026664" cy="914400"/>
           </a:xfrm>
           <a:prstGeom prst="rect">
@@ -21760,14 +22088,14 @@
       </p:sp>
       <p:sp>
         <p:nvSpPr>
-          <p:cNvPr id="7" name="lista"/>
+          <p:cNvPr id="8" name="lista"/>
           <p:cNvSpPr txBox="1"/>
           <p:nvPr/>
         </p:nvSpPr>
         <p:spPr>
           <a:xfrm>
-            <a:off x="731520" y="3657600"/>
-            <a:ext cx="3118104" cy="2377440"/>
+            <a:off x="731520" y="5124796"/>
+            <a:ext cx="3118104" cy="910244"/>
           </a:xfrm>
           <a:prstGeom prst="rect">
             <a:avLst/>
@@ -21831,7 +22159,7 @@
       </p:sp>
       <p:sp>
         <p:nvSpPr>
-          <p:cNvPr id="8" name="col_1"/>
+          <p:cNvPr id="9" name="col_1"/>
           <p:cNvSpPr/>
           <p:nvPr/>
         </p:nvSpPr>
@@ -21858,7 +22186,7 @@
       </p:sp>
       <p:sp>
         <p:nvSpPr>
-          <p:cNvPr id="9" name="Text 7"/>
+          <p:cNvPr id="10" name="Text 7"/>
           <p:cNvSpPr txBox="1"/>
           <p:nvPr/>
         </p:nvSpPr>
@@ -21894,15 +22222,39 @@
           </a:p>
         </p:txBody>
       </p:sp>
-      <p:sp>
-        <p:nvSpPr>
-          <p:cNvPr id="10" name="Text 8"/>
+      <p:pic>
+        <p:nvPicPr>
+          <p:cNvPr id="11" name="col_img_1" descr="C:\Users\Chingu\AppData\Local\Temp\claude\C--Users-Chingu-Desktop-ACADEMIASEULWEB\d4111e1b-5523-44ea-97b2-b1a1d9545b9e\scratchpad\decks\cache\img_bdf3e9b87e3254b6.png"/>
+          <p:cNvPicPr>
+            <a:picLocks noChangeAspect="1"/>
+          </p:cNvPicPr>
+          <p:nvPr/>
+        </p:nvPicPr>
+        <p:blipFill>
+          <a:blip r:embed="rId4"/>
+          <a:stretch>
+            <a:fillRect/>
+          </a:stretch>
+        </p:blipFill>
+        <p:spPr>
+          <a:xfrm>
+            <a:off x="5142281" y="2651760"/>
+            <a:ext cx="1904390" cy="865632"/>
+          </a:xfrm>
+          <a:prstGeom prst="rect">
+            <a:avLst/>
+          </a:prstGeom>
+        </p:spPr>
+      </p:pic>
+      <p:sp>
+        <p:nvSpPr>
+          <p:cNvPr id="12" name="Text 8"/>
           <p:cNvSpPr txBox="1"/>
           <p:nvPr/>
         </p:nvSpPr>
         <p:spPr>
           <a:xfrm>
-            <a:off x="4581144" y="2651760"/>
+            <a:off x="4581144" y="3608832"/>
             <a:ext cx="3026664" cy="914400"/>
           </a:xfrm>
           <a:prstGeom prst="rect">
@@ -21937,14 +22289,14 @@
       </p:sp>
       <p:sp>
         <p:nvSpPr>
-          <p:cNvPr id="11" name="lista"/>
+          <p:cNvPr id="13" name="lista"/>
           <p:cNvSpPr txBox="1"/>
           <p:nvPr/>
         </p:nvSpPr>
         <p:spPr>
           <a:xfrm>
-            <a:off x="4535424" y="3657600"/>
-            <a:ext cx="3118104" cy="2377440"/>
+            <a:off x="4535424" y="4614672"/>
+            <a:ext cx="3118104" cy="1420368"/>
           </a:xfrm>
           <a:prstGeom prst="rect">
             <a:avLst/>
@@ -21966,14 +22318,14 @@
               <a:buChar char="•"/>
             </a:pPr>
             <a:r>
-              <a:rPr lang="en-US" sz="1800" dirty="0">
+              <a:rPr lang="en-US" sz="1700" dirty="0">
                 <a:solidFill>
                   <a:srgbClr val="14142B"/>
                 </a:solidFill>
               </a:rPr>
               <a:t>ahí</a:t>
             </a:r>
-            <a:endParaRPr lang="en-US" sz="1800" dirty="0"/>
+            <a:endParaRPr lang="en-US" sz="1700" dirty="0"/>
           </a:p>
           <a:p>
             <a:pPr marL="228600" indent="-228600" eaLnBrk="1">
@@ -21984,14 +22336,14 @@
               <a:buChar char="•"/>
             </a:pPr>
             <a:r>
-              <a:rPr lang="en-US" sz="1800" dirty="0">
+              <a:rPr lang="en-US" sz="1700" dirty="0">
                 <a:solidFill>
                   <a:srgbClr val="14142B"/>
                 </a:solidFill>
               </a:rPr>
               <a:t>o el lugar del que hablamos</a:t>
             </a:r>
-            <a:endParaRPr lang="en-US" sz="1800" dirty="0"/>
+            <a:endParaRPr lang="en-US" sz="1700" dirty="0"/>
           </a:p>
           <a:p>
             <a:pPr marL="228600" indent="-228600" eaLnBrk="1">
@@ -22002,7 +22354,7 @@
               <a:buChar char="•"/>
             </a:pPr>
             <a:r>
-              <a:rPr lang="ko-KR" altLang="en-US" sz="1800" dirty="0">
+              <a:rPr lang="ko-KR" altLang="en-US" sz="1700" dirty="0">
                 <a:solidFill>
                   <a:srgbClr val="14142B"/>
                 </a:solidFill>
@@ -22013,20 +22365,20 @@
               <a:t>como 그거 </a:t>
             </a:r>
             <a:r>
-              <a:rPr lang="en-US" sz="1800" dirty="0">
+              <a:rPr lang="en-US" sz="1700" dirty="0">
                 <a:solidFill>
                   <a:srgbClr val="14142B"/>
                 </a:solidFill>
               </a:rPr>
               <a:t>(eso)</a:t>
             </a:r>
-            <a:endParaRPr lang="en-US" sz="1800" dirty="0"/>
-          </a:p>
-        </p:txBody>
-      </p:sp>
-      <p:sp>
-        <p:nvSpPr>
-          <p:cNvPr id="12" name="col_2"/>
+            <a:endParaRPr lang="en-US" sz="1700" dirty="0"/>
+          </a:p>
+        </p:txBody>
+      </p:sp>
+      <p:sp>
+        <p:nvSpPr>
+          <p:cNvPr id="14" name="col_2"/>
           <p:cNvSpPr/>
           <p:nvPr/>
         </p:nvSpPr>
@@ -22053,7 +22405,7 @@
       </p:sp>
       <p:sp>
         <p:nvSpPr>
-          <p:cNvPr id="13" name="Text 11"/>
+          <p:cNvPr id="15" name="Text 11"/>
           <p:cNvSpPr txBox="1"/>
           <p:nvPr/>
         </p:nvSpPr>
@@ -22089,15 +22441,39 @@
           </a:p>
         </p:txBody>
       </p:sp>
-      <p:sp>
-        <p:nvSpPr>
-          <p:cNvPr id="14" name="Text 12"/>
+      <p:pic>
+        <p:nvPicPr>
+          <p:cNvPr id="16" name="col_img_2" descr="C:\Users\Chingu\AppData\Local\Temp\claude\C--Users-Chingu-Desktop-ACADEMIASEULWEB\d4111e1b-5523-44ea-97b2-b1a1d9545b9e\scratchpad\decks\cache\img_bd8196e0d495181c.png"/>
+          <p:cNvPicPr>
+            <a:picLocks noChangeAspect="1"/>
+          </p:cNvPicPr>
+          <p:nvPr/>
+        </p:nvPicPr>
+        <p:blipFill>
+          <a:blip r:embed="rId5"/>
+          <a:stretch>
+            <a:fillRect/>
+          </a:stretch>
+        </p:blipFill>
+        <p:spPr>
+          <a:xfrm>
+            <a:off x="8385048" y="2651760"/>
+            <a:ext cx="3026664" cy="1375756"/>
+          </a:xfrm>
+          <a:prstGeom prst="rect">
+            <a:avLst/>
+          </a:prstGeom>
+        </p:spPr>
+      </p:pic>
+      <p:sp>
+        <p:nvSpPr>
+          <p:cNvPr id="17" name="Text 12"/>
           <p:cNvSpPr txBox="1"/>
           <p:nvPr/>
         </p:nvSpPr>
         <p:spPr>
           <a:xfrm>
-            <a:off x="8385048" y="2651760"/>
+            <a:off x="8385048" y="4118956"/>
             <a:ext cx="3026664" cy="914400"/>
           </a:xfrm>
           <a:prstGeom prst="rect">
@@ -22132,14 +22508,14 @@
       </p:sp>
       <p:sp>
         <p:nvSpPr>
-          <p:cNvPr id="15" name="lista"/>
+          <p:cNvPr id="18" name="lista"/>
           <p:cNvSpPr txBox="1"/>
           <p:nvPr/>
         </p:nvSpPr>
         <p:spPr>
           <a:xfrm>
-            <a:off x="8339328" y="3657600"/>
-            <a:ext cx="3118104" cy="2377440"/>
+            <a:off x="8339328" y="5124796"/>
+            <a:ext cx="3118104" cy="910244"/>
           </a:xfrm>
           <a:prstGeom prst="rect">
             <a:avLst/>
@@ -22333,16 +22709,40 @@
           </a:p>
         </p:txBody>
       </p:sp>
-      <p:sp>
-        <p:nvSpPr>
-          <p:cNvPr id="3" name="Text 1"/>
+      <p:pic>
+        <p:nvPicPr>
+          <p:cNvPr id="3" name="imagen" descr="C:\Users\Chingu\AppData\Local\Temp\claude\C--Users-Chingu-Desktop-ACADEMIASEULWEB\d4111e1b-5523-44ea-97b2-b1a1d9545b9e\scratchpad\decks\cache\img_21471846d17cd1af.png"/>
+          <p:cNvPicPr>
+            <a:picLocks noChangeAspect="1"/>
+          </p:cNvPicPr>
+          <p:nvPr/>
+        </p:nvPicPr>
+        <p:blipFill>
+          <a:blip r:embed="rId3"/>
+          <a:stretch>
+            <a:fillRect/>
+          </a:stretch>
+        </p:blipFill>
+        <p:spPr>
+          <a:xfrm>
+            <a:off x="7754112" y="1508760"/>
+            <a:ext cx="3886200" cy="4480560"/>
+          </a:xfrm>
+          <a:prstGeom prst="rect">
+            <a:avLst/>
+          </a:prstGeom>
+        </p:spPr>
+      </p:pic>
+      <p:sp>
+        <p:nvSpPr>
+          <p:cNvPr id="4" name="Text 1"/>
           <p:cNvSpPr txBox="1"/>
           <p:nvPr/>
         </p:nvSpPr>
         <p:spPr>
           <a:xfrm>
             <a:off x="548640" y="1325880"/>
-            <a:ext cx="11064240" cy="548640"/>
+            <a:ext cx="6931152" cy="548640"/>
           </a:xfrm>
           <a:prstGeom prst="rect">
             <a:avLst/>
@@ -22403,7 +22803,7 @@
       </p:sp>
       <p:sp>
         <p:nvSpPr>
-          <p:cNvPr id="4" name="num_0"/>
+          <p:cNvPr id="5" name="num_0"/>
           <p:cNvSpPr/>
           <p:nvPr/>
         </p:nvSpPr>
@@ -22428,7 +22828,7 @@
       </p:sp>
       <p:sp>
         <p:nvSpPr>
-          <p:cNvPr id="5" name="Text 3"/>
+          <p:cNvPr id="6" name="Text 3"/>
           <p:cNvSpPr txBox="1"/>
           <p:nvPr/>
         </p:nvSpPr>
@@ -22466,14 +22866,14 @@
       </p:sp>
       <p:sp>
         <p:nvSpPr>
-          <p:cNvPr id="6" name="Text 4"/>
+          <p:cNvPr id="7" name="Text 4"/>
           <p:cNvSpPr txBox="1"/>
           <p:nvPr/>
         </p:nvSpPr>
         <p:spPr>
           <a:xfrm>
             <a:off x="1188720" y="1965960"/>
-            <a:ext cx="6080760" cy="594360"/>
+            <a:ext cx="2735519" cy="594360"/>
           </a:xfrm>
           <a:prstGeom prst="rect">
             <a:avLst/>
@@ -22491,7 +22891,7 @@
               <a:buNone/>
             </a:pPr>
             <a:r>
-              <a:rPr lang="ko-KR" altLang="en-US" sz="2400" dirty="0">
+              <a:rPr lang="ko-KR" altLang="en-US" sz="1900" dirty="0">
                 <a:solidFill>
                   <a:srgbClr val="14142B"/>
                 </a:solidFill>
@@ -22502,27 +22902,27 @@
               <a:t>컴퓨터가 책상 위에 있어요</a:t>
             </a:r>
             <a:r>
-              <a:rPr lang="en-US" sz="2400" dirty="0">
+              <a:rPr lang="en-US" sz="1900" dirty="0">
                 <a:solidFill>
                   <a:srgbClr val="14142B"/>
                 </a:solidFill>
               </a:rPr>
               <a:t>?</a:t>
             </a:r>
-            <a:endParaRPr lang="en-US" sz="2400" dirty="0"/>
-          </a:p>
-        </p:txBody>
-      </p:sp>
-      <p:sp>
-        <p:nvSpPr>
-          <p:cNvPr id="7" name="rev_5_caja"/>
+            <a:endParaRPr lang="en-US" sz="1900" dirty="0"/>
+          </a:p>
+        </p:txBody>
+      </p:sp>
+      <p:sp>
+        <p:nvSpPr>
+          <p:cNvPr id="8" name="rev_5_caja"/>
           <p:cNvSpPr/>
           <p:nvPr/>
         </p:nvSpPr>
         <p:spPr>
           <a:xfrm>
-            <a:off x="7498080" y="2002536"/>
-            <a:ext cx="4142232" cy="521208"/>
+            <a:off x="4152839" y="2002536"/>
+            <a:ext cx="3326953" cy="521208"/>
           </a:xfrm>
           <a:prstGeom prst="roundRect">
             <a:avLst>
@@ -22542,14 +22942,14 @@
       </p:sp>
       <p:sp>
         <p:nvSpPr>
-          <p:cNvPr id="8" name="rev_5_txt"/>
+          <p:cNvPr id="9" name="rev_5_txt"/>
           <p:cNvSpPr txBox="1"/>
           <p:nvPr/>
         </p:nvSpPr>
         <p:spPr>
           <a:xfrm>
-            <a:off x="7589520" y="2002536"/>
-            <a:ext cx="3959352" cy="521208"/>
+            <a:off x="4244279" y="2002536"/>
+            <a:ext cx="3144073" cy="521208"/>
           </a:xfrm>
           <a:prstGeom prst="rect">
             <a:avLst/>
@@ -22591,7 +22991,7 @@
       </p:sp>
       <p:sp>
         <p:nvSpPr>
-          <p:cNvPr id="9" name="num_1"/>
+          <p:cNvPr id="10" name="num_1"/>
           <p:cNvSpPr/>
           <p:nvPr/>
         </p:nvSpPr>
@@ -22616,7 +23016,7 @@
       </p:sp>
       <p:sp>
         <p:nvSpPr>
-          <p:cNvPr id="10" name="Text 8"/>
+          <p:cNvPr id="11" name="Text 8"/>
           <p:cNvSpPr txBox="1"/>
           <p:nvPr/>
         </p:nvSpPr>
@@ -22654,14 +23054,14 @@
       </p:sp>
       <p:sp>
         <p:nvSpPr>
-          <p:cNvPr id="11" name="Text 9"/>
+          <p:cNvPr id="12" name="Text 9"/>
           <p:cNvSpPr txBox="1"/>
           <p:nvPr/>
         </p:nvSpPr>
         <p:spPr>
           <a:xfrm>
             <a:off x="1188720" y="2688336"/>
-            <a:ext cx="6080760" cy="594360"/>
+            <a:ext cx="2735519" cy="594360"/>
           </a:xfrm>
           <a:prstGeom prst="rect">
             <a:avLst/>
@@ -22679,7 +23079,7 @@
               <a:buNone/>
             </a:pPr>
             <a:r>
-              <a:rPr lang="ko-KR" altLang="en-US" sz="2400" dirty="0">
+              <a:rPr lang="ko-KR" altLang="en-US" sz="1900" dirty="0">
                 <a:solidFill>
                   <a:srgbClr val="14142B"/>
                 </a:solidFill>
@@ -22690,27 +23090,27 @@
               <a:t>커피가 컴퓨터 옆에 있어요</a:t>
             </a:r>
             <a:r>
-              <a:rPr lang="en-US" sz="2400" dirty="0">
+              <a:rPr lang="en-US" sz="1900" dirty="0">
                 <a:solidFill>
                   <a:srgbClr val="14142B"/>
                 </a:solidFill>
               </a:rPr>
               <a:t>?</a:t>
             </a:r>
-            <a:endParaRPr lang="en-US" sz="2400" dirty="0"/>
-          </a:p>
-        </p:txBody>
-      </p:sp>
-      <p:sp>
-        <p:nvSpPr>
-          <p:cNvPr id="12" name="rev_6_caja"/>
+            <a:endParaRPr lang="en-US" sz="1900" dirty="0"/>
+          </a:p>
+        </p:txBody>
+      </p:sp>
+      <p:sp>
+        <p:nvSpPr>
+          <p:cNvPr id="13" name="rev_6_caja"/>
           <p:cNvSpPr/>
           <p:nvPr/>
         </p:nvSpPr>
         <p:spPr>
           <a:xfrm>
-            <a:off x="7498080" y="2724912"/>
-            <a:ext cx="4142232" cy="521208"/>
+            <a:off x="4152839" y="2724912"/>
+            <a:ext cx="3326953" cy="521208"/>
           </a:xfrm>
           <a:prstGeom prst="roundRect">
             <a:avLst>
@@ -22730,14 +23130,14 @@
       </p:sp>
       <p:sp>
         <p:nvSpPr>
-          <p:cNvPr id="13" name="rev_6_txt"/>
+          <p:cNvPr id="14" name="rev_6_txt"/>
           <p:cNvSpPr txBox="1"/>
           <p:nvPr/>
         </p:nvSpPr>
         <p:spPr>
           <a:xfrm>
-            <a:off x="7589520" y="2724912"/>
-            <a:ext cx="3959352" cy="521208"/>
+            <a:off x="4244279" y="2724912"/>
+            <a:ext cx="3144073" cy="521208"/>
           </a:xfrm>
           <a:prstGeom prst="rect">
             <a:avLst/>
@@ -22779,7 +23179,7 @@
       </p:sp>
       <p:sp>
         <p:nvSpPr>
-          <p:cNvPr id="14" name="num_2"/>
+          <p:cNvPr id="15" name="num_2"/>
           <p:cNvSpPr/>
           <p:nvPr/>
         </p:nvSpPr>
@@ -22804,7 +23204,7 @@
       </p:sp>
       <p:sp>
         <p:nvSpPr>
-          <p:cNvPr id="15" name="Text 13"/>
+          <p:cNvPr id="16" name="Text 13"/>
           <p:cNvSpPr txBox="1"/>
           <p:nvPr/>
         </p:nvSpPr>
@@ -22842,14 +23242,14 @@
       </p:sp>
       <p:sp>
         <p:nvSpPr>
-          <p:cNvPr id="16" name="Text 14"/>
+          <p:cNvPr id="17" name="Text 14"/>
           <p:cNvSpPr txBox="1"/>
           <p:nvPr/>
         </p:nvSpPr>
         <p:spPr>
           <a:xfrm>
             <a:off x="1188720" y="3410712"/>
-            <a:ext cx="6080760" cy="594360"/>
+            <a:ext cx="2735519" cy="594360"/>
           </a:xfrm>
           <a:prstGeom prst="rect">
             <a:avLst/>
@@ -22867,7 +23267,7 @@
               <a:buNone/>
             </a:pPr>
             <a:r>
-              <a:rPr lang="ko-KR" altLang="en-US" sz="2400" dirty="0">
+              <a:rPr lang="ko-KR" altLang="en-US" sz="1900" dirty="0">
                 <a:solidFill>
                   <a:srgbClr val="14142B"/>
                 </a:solidFill>
@@ -22878,27 +23278,27 @@
               <a:t>휴대폰이 가방 안에 있어요</a:t>
             </a:r>
             <a:r>
-              <a:rPr lang="en-US" sz="2400" dirty="0">
+              <a:rPr lang="en-US" sz="1900" dirty="0">
                 <a:solidFill>
                   <a:srgbClr val="14142B"/>
                 </a:solidFill>
               </a:rPr>
               <a:t>?</a:t>
             </a:r>
-            <a:endParaRPr lang="en-US" sz="2400" dirty="0"/>
-          </a:p>
-        </p:txBody>
-      </p:sp>
-      <p:sp>
-        <p:nvSpPr>
-          <p:cNvPr id="17" name="rev_7_caja"/>
+            <a:endParaRPr lang="en-US" sz="1900" dirty="0"/>
+          </a:p>
+        </p:txBody>
+      </p:sp>
+      <p:sp>
+        <p:nvSpPr>
+          <p:cNvPr id="18" name="rev_7_caja"/>
           <p:cNvSpPr/>
           <p:nvPr/>
         </p:nvSpPr>
         <p:spPr>
           <a:xfrm>
-            <a:off x="7498080" y="3447288"/>
-            <a:ext cx="4142232" cy="521208"/>
+            <a:off x="4152839" y="3447288"/>
+            <a:ext cx="3326953" cy="521208"/>
           </a:xfrm>
           <a:prstGeom prst="roundRect">
             <a:avLst>
@@ -22918,14 +23318,14 @@
       </p:sp>
       <p:sp>
         <p:nvSpPr>
-          <p:cNvPr id="18" name="rev_7_txt"/>
+          <p:cNvPr id="19" name="rev_7_txt"/>
           <p:cNvSpPr txBox="1"/>
           <p:nvPr/>
         </p:nvSpPr>
         <p:spPr>
           <a:xfrm>
-            <a:off x="7589520" y="3447288"/>
-            <a:ext cx="3959352" cy="521208"/>
+            <a:off x="4244279" y="3447288"/>
+            <a:ext cx="3144073" cy="521208"/>
           </a:xfrm>
           <a:prstGeom prst="rect">
             <a:avLst/>
@@ -22943,7 +23343,7 @@
               <a:buNone/>
             </a:pPr>
             <a:r>
-              <a:rPr lang="ko-KR" altLang="en-US" sz="2200" b="1" dirty="0">
+              <a:rPr lang="ko-KR" altLang="en-US" sz="1900" b="1" dirty="0">
                 <a:solidFill>
                   <a:srgbClr val="FFFFFF"/>
                 </a:solidFill>
@@ -22954,7 +23354,7 @@
               <a:t>아니요</a:t>
             </a:r>
             <a:r>
-              <a:rPr lang="en-US" sz="2200" b="1" dirty="0">
+              <a:rPr lang="en-US" sz="1900" b="1" dirty="0">
                 <a:solidFill>
                   <a:srgbClr val="FFFFFF"/>
                 </a:solidFill>
@@ -22962,7 +23362,7 @@
               <a:t>, </a:t>
             </a:r>
             <a:r>
-              <a:rPr lang="ko-KR" altLang="en-US" sz="2200" b="1" dirty="0">
+              <a:rPr lang="ko-KR" altLang="en-US" sz="1900" b="1" dirty="0">
                 <a:solidFill>
                   <a:srgbClr val="FFFFFF"/>
                 </a:solidFill>
@@ -22973,20 +23373,20 @@
               <a:t>책 위에 있어요</a:t>
             </a:r>
             <a:r>
-              <a:rPr lang="en-US" sz="2200" b="1" dirty="0">
+              <a:rPr lang="en-US" sz="1900" b="1" dirty="0">
                 <a:solidFill>
                   <a:srgbClr val="FFFFFF"/>
                 </a:solidFill>
               </a:rPr>
               <a:t>.</a:t>
             </a:r>
-            <a:endParaRPr lang="en-US" sz="2200" dirty="0"/>
-          </a:p>
-        </p:txBody>
-      </p:sp>
-      <p:sp>
-        <p:nvSpPr>
-          <p:cNvPr id="19" name="num_3"/>
+            <a:endParaRPr lang="en-US" sz="1900" dirty="0"/>
+          </a:p>
+        </p:txBody>
+      </p:sp>
+      <p:sp>
+        <p:nvSpPr>
+          <p:cNvPr id="20" name="num_3"/>
           <p:cNvSpPr/>
           <p:nvPr/>
         </p:nvSpPr>
@@ -23011,7 +23411,7 @@
       </p:sp>
       <p:sp>
         <p:nvSpPr>
-          <p:cNvPr id="20" name="Text 18"/>
+          <p:cNvPr id="21" name="Text 18"/>
           <p:cNvSpPr txBox="1"/>
           <p:nvPr/>
         </p:nvSpPr>
@@ -23049,14 +23449,14 @@
       </p:sp>
       <p:sp>
         <p:nvSpPr>
-          <p:cNvPr id="21" name="Text 19"/>
+          <p:cNvPr id="22" name="Text 19"/>
           <p:cNvSpPr txBox="1"/>
           <p:nvPr/>
         </p:nvSpPr>
         <p:spPr>
           <a:xfrm>
             <a:off x="1188720" y="4133088"/>
-            <a:ext cx="6080760" cy="594360"/>
+            <a:ext cx="2735519" cy="594360"/>
           </a:xfrm>
           <a:prstGeom prst="rect">
             <a:avLst/>
@@ -23074,7 +23474,7 @@
               <a:buNone/>
             </a:pPr>
             <a:r>
-              <a:rPr lang="ko-KR" altLang="en-US" sz="2400" dirty="0">
+              <a:rPr lang="ko-KR" altLang="en-US" sz="1900" dirty="0">
                 <a:solidFill>
                   <a:srgbClr val="14142B"/>
                 </a:solidFill>
@@ -23085,27 +23485,27 @@
               <a:t>가방이 책상 아래에 있어요</a:t>
             </a:r>
             <a:r>
-              <a:rPr lang="en-US" sz="2400" dirty="0">
+              <a:rPr lang="en-US" sz="1900" dirty="0">
                 <a:solidFill>
                   <a:srgbClr val="14142B"/>
                 </a:solidFill>
               </a:rPr>
               <a:t>?</a:t>
             </a:r>
-            <a:endParaRPr lang="en-US" sz="2400" dirty="0"/>
-          </a:p>
-        </p:txBody>
-      </p:sp>
-      <p:sp>
-        <p:nvSpPr>
-          <p:cNvPr id="22" name="rev_8_caja"/>
+            <a:endParaRPr lang="en-US" sz="1900" dirty="0"/>
+          </a:p>
+        </p:txBody>
+      </p:sp>
+      <p:sp>
+        <p:nvSpPr>
+          <p:cNvPr id="23" name="rev_8_caja"/>
           <p:cNvSpPr/>
           <p:nvPr/>
         </p:nvSpPr>
         <p:spPr>
           <a:xfrm>
-            <a:off x="7498080" y="4169664"/>
-            <a:ext cx="4142232" cy="521208"/>
+            <a:off x="4152839" y="4169664"/>
+            <a:ext cx="3326953" cy="521208"/>
           </a:xfrm>
           <a:prstGeom prst="roundRect">
             <a:avLst>
@@ -23125,14 +23525,14 @@
       </p:sp>
       <p:sp>
         <p:nvSpPr>
-          <p:cNvPr id="23" name="rev_8_txt"/>
+          <p:cNvPr id="24" name="rev_8_txt"/>
           <p:cNvSpPr txBox="1"/>
           <p:nvPr/>
         </p:nvSpPr>
         <p:spPr>
           <a:xfrm>
-            <a:off x="7589520" y="4169664"/>
-            <a:ext cx="3959352" cy="521208"/>
+            <a:off x="4244279" y="4169664"/>
+            <a:ext cx="3144073" cy="521208"/>
           </a:xfrm>
           <a:prstGeom prst="rect">
             <a:avLst/>
@@ -23174,7 +23574,7 @@
       </p:sp>
       <p:sp>
         <p:nvSpPr>
-          <p:cNvPr id="24" name="num_4"/>
+          <p:cNvPr id="25" name="num_4"/>
           <p:cNvSpPr/>
           <p:nvPr/>
         </p:nvSpPr>
@@ -23199,7 +23599,7 @@
       </p:sp>
       <p:sp>
         <p:nvSpPr>
-          <p:cNvPr id="25" name="Text 23"/>
+          <p:cNvPr id="26" name="Text 23"/>
           <p:cNvSpPr txBox="1"/>
           <p:nvPr/>
         </p:nvSpPr>
@@ -23237,14 +23637,14 @@
       </p:sp>
       <p:sp>
         <p:nvSpPr>
-          <p:cNvPr id="26" name="Text 24"/>
+          <p:cNvPr id="27" name="Text 24"/>
           <p:cNvSpPr txBox="1"/>
           <p:nvPr/>
         </p:nvSpPr>
         <p:spPr>
           <a:xfrm>
             <a:off x="1188720" y="4855464"/>
-            <a:ext cx="6080760" cy="594360"/>
+            <a:ext cx="2735519" cy="594360"/>
           </a:xfrm>
           <a:prstGeom prst="rect">
             <a:avLst/>
@@ -23262,7 +23662,7 @@
               <a:buNone/>
             </a:pPr>
             <a:r>
-              <a:rPr lang="ko-KR" altLang="en-US" sz="2400" dirty="0">
+              <a:rPr lang="ko-KR" altLang="en-US" sz="1900" dirty="0">
                 <a:solidFill>
                   <a:srgbClr val="14142B"/>
                 </a:solidFill>
@@ -23273,27 +23673,27 @@
               <a:t>고양이가 의자 뒤에 있어요</a:t>
             </a:r>
             <a:r>
-              <a:rPr lang="en-US" sz="2400" dirty="0">
+              <a:rPr lang="en-US" sz="1900" dirty="0">
                 <a:solidFill>
                   <a:srgbClr val="14142B"/>
                 </a:solidFill>
               </a:rPr>
               <a:t>?</a:t>
             </a:r>
-            <a:endParaRPr lang="en-US" sz="2400" dirty="0"/>
-          </a:p>
-        </p:txBody>
-      </p:sp>
-      <p:sp>
-        <p:nvSpPr>
-          <p:cNvPr id="27" name="rev_9_caja"/>
+            <a:endParaRPr lang="en-US" sz="1900" dirty="0"/>
+          </a:p>
+        </p:txBody>
+      </p:sp>
+      <p:sp>
+        <p:nvSpPr>
+          <p:cNvPr id="28" name="rev_9_caja"/>
           <p:cNvSpPr/>
           <p:nvPr/>
         </p:nvSpPr>
         <p:spPr>
           <a:xfrm>
-            <a:off x="7498080" y="4892040"/>
-            <a:ext cx="4142232" cy="521208"/>
+            <a:off x="4152839" y="4892040"/>
+            <a:ext cx="3326953" cy="521208"/>
           </a:xfrm>
           <a:prstGeom prst="roundRect">
             <a:avLst>
@@ -23313,14 +23713,14 @@
       </p:sp>
       <p:sp>
         <p:nvSpPr>
-          <p:cNvPr id="28" name="rev_9_txt"/>
+          <p:cNvPr id="29" name="rev_9_txt"/>
           <p:cNvSpPr txBox="1"/>
           <p:nvPr/>
         </p:nvSpPr>
         <p:spPr>
           <a:xfrm>
-            <a:off x="7589520" y="4892040"/>
-            <a:ext cx="3959352" cy="521208"/>
+            <a:off x="4244279" y="4892040"/>
+            <a:ext cx="3144073" cy="521208"/>
           </a:xfrm>
           <a:prstGeom prst="rect">
             <a:avLst/>
@@ -23362,7 +23762,7 @@
       </p:sp>
       <p:sp>
         <p:nvSpPr>
-          <p:cNvPr id="29" name="num_5"/>
+          <p:cNvPr id="30" name="num_5"/>
           <p:cNvSpPr/>
           <p:nvPr/>
         </p:nvSpPr>
@@ -23387,7 +23787,7 @@
       </p:sp>
       <p:sp>
         <p:nvSpPr>
-          <p:cNvPr id="30" name="Text 28"/>
+          <p:cNvPr id="31" name="Text 28"/>
           <p:cNvSpPr txBox="1"/>
           <p:nvPr/>
         </p:nvSpPr>
@@ -23425,14 +23825,14 @@
       </p:sp>
       <p:sp>
         <p:nvSpPr>
-          <p:cNvPr id="31" name="Text 29"/>
+          <p:cNvPr id="32" name="Text 29"/>
           <p:cNvSpPr txBox="1"/>
           <p:nvPr/>
         </p:nvSpPr>
         <p:spPr>
           <a:xfrm>
             <a:off x="1188720" y="5577840"/>
-            <a:ext cx="6080760" cy="594360"/>
+            <a:ext cx="2735519" cy="594360"/>
           </a:xfrm>
           <a:prstGeom prst="rect">
             <a:avLst/>
@@ -23450,7 +23850,7 @@
               <a:buNone/>
             </a:pPr>
             <a:r>
-              <a:rPr lang="ko-KR" altLang="en-US" sz="2400" dirty="0">
+              <a:rPr lang="ko-KR" altLang="en-US" sz="1900" dirty="0">
                 <a:solidFill>
                   <a:srgbClr val="14142B"/>
                 </a:solidFill>
@@ -23461,27 +23861,27 @@
               <a:t>우산이 책상 옆에 있어요</a:t>
             </a:r>
             <a:r>
-              <a:rPr lang="en-US" sz="2400" dirty="0">
+              <a:rPr lang="en-US" sz="1900" dirty="0">
                 <a:solidFill>
                   <a:srgbClr val="14142B"/>
                 </a:solidFill>
               </a:rPr>
               <a:t>?</a:t>
             </a:r>
-            <a:endParaRPr lang="en-US" sz="2400" dirty="0"/>
-          </a:p>
-        </p:txBody>
-      </p:sp>
-      <p:sp>
-        <p:nvSpPr>
-          <p:cNvPr id="32" name="rev_10_caja"/>
+            <a:endParaRPr lang="en-US" sz="1900" dirty="0"/>
+          </a:p>
+        </p:txBody>
+      </p:sp>
+      <p:sp>
+        <p:nvSpPr>
+          <p:cNvPr id="33" name="rev_10_caja"/>
           <p:cNvSpPr/>
           <p:nvPr/>
         </p:nvSpPr>
         <p:spPr>
           <a:xfrm>
-            <a:off x="7498080" y="5614416"/>
-            <a:ext cx="4142232" cy="521208"/>
+            <a:off x="4152839" y="5614416"/>
+            <a:ext cx="3326953" cy="521208"/>
           </a:xfrm>
           <a:prstGeom prst="roundRect">
             <a:avLst>
@@ -23501,14 +23901,14 @@
       </p:sp>
       <p:sp>
         <p:nvSpPr>
-          <p:cNvPr id="33" name="rev_10_txt"/>
+          <p:cNvPr id="34" name="rev_10_txt"/>
           <p:cNvSpPr txBox="1"/>
           <p:nvPr/>
         </p:nvSpPr>
         <p:spPr>
           <a:xfrm>
-            <a:off x="7589520" y="5614416"/>
-            <a:ext cx="3959352" cy="521208"/>
+            <a:off x="4244279" y="5614416"/>
+            <a:ext cx="3144073" cy="521208"/>
           </a:xfrm>
           <a:prstGeom prst="rect">
             <a:avLst/>
@@ -23569,7 +23969,7 @@
       </p:sp>
       <p:sp>
         <p:nvSpPr>
-          <p:cNvPr id="34" name="Slide Number Placeholder 0"/>
+          <p:cNvPr id="35" name="Slide Number Placeholder 0"/>
           <p:cNvSpPr>
             <a:spLocks noGrp="1"/>
           </p:cNvSpPr>
@@ -23654,7 +24054,7 @@
                                           </p:stCondLst>
                                         </p:cTn>
                                         <p:tgtEl>
-                                          <p:spTgt spid="7"/>
+                                          <p:spTgt spid="8"/>
                                         </p:tgtEl>
                                         <p:attrNameLst>
                                           <p:attrName>style.visibility</p:attrName>
@@ -23681,7 +24081,7 @@
                                           </p:stCondLst>
                                         </p:cTn>
                                         <p:tgtEl>
-                                          <p:spTgt spid="8"/>
+                                          <p:spTgt spid="9"/>
                                         </p:tgtEl>
                                         <p:attrNameLst>
                                           <p:attrName>style.visibility</p:attrName>
@@ -23726,7 +24126,7 @@
                                           </p:stCondLst>
                                         </p:cTn>
                                         <p:tgtEl>
-                                          <p:spTgt spid="12"/>
+                                          <p:spTgt spid="13"/>
                                         </p:tgtEl>
                                         <p:attrNameLst>
                                           <p:attrName>style.visibility</p:attrName>
@@ -23753,7 +24153,7 @@
                                           </p:stCondLst>
                                         </p:cTn>
                                         <p:tgtEl>
-                                          <p:spTgt spid="13"/>
+                                          <p:spTgt spid="14"/>
                                         </p:tgtEl>
                                         <p:attrNameLst>
                                           <p:attrName>style.visibility</p:attrName>
@@ -23798,7 +24198,7 @@
                                           </p:stCondLst>
                                         </p:cTn>
                                         <p:tgtEl>
-                                          <p:spTgt spid="17"/>
+                                          <p:spTgt spid="18"/>
                                         </p:tgtEl>
                                         <p:attrNameLst>
                                           <p:attrName>style.visibility</p:attrName>
@@ -23825,7 +24225,7 @@
                                           </p:stCondLst>
                                         </p:cTn>
                                         <p:tgtEl>
-                                          <p:spTgt spid="18"/>
+                                          <p:spTgt spid="19"/>
                                         </p:tgtEl>
                                         <p:attrNameLst>
                                           <p:attrName>style.visibility</p:attrName>
@@ -23870,7 +24270,7 @@
                                           </p:stCondLst>
                                         </p:cTn>
                                         <p:tgtEl>
-                                          <p:spTgt spid="22"/>
+                                          <p:spTgt spid="23"/>
                                         </p:tgtEl>
                                         <p:attrNameLst>
                                           <p:attrName>style.visibility</p:attrName>
@@ -23897,7 +24297,7 @@
                                           </p:stCondLst>
                                         </p:cTn>
                                         <p:tgtEl>
-                                          <p:spTgt spid="23"/>
+                                          <p:spTgt spid="24"/>
                                         </p:tgtEl>
                                         <p:attrNameLst>
                                           <p:attrName>style.visibility</p:attrName>
@@ -23942,7 +24342,7 @@
                                           </p:stCondLst>
                                         </p:cTn>
                                         <p:tgtEl>
-                                          <p:spTgt spid="27"/>
+                                          <p:spTgt spid="28"/>
                                         </p:tgtEl>
                                         <p:attrNameLst>
                                           <p:attrName>style.visibility</p:attrName>
@@ -23969,7 +24369,7 @@
                                           </p:stCondLst>
                                         </p:cTn>
                                         <p:tgtEl>
-                                          <p:spTgt spid="28"/>
+                                          <p:spTgt spid="29"/>
                                         </p:tgtEl>
                                         <p:attrNameLst>
                                           <p:attrName>style.visibility</p:attrName>
@@ -24014,7 +24414,7 @@
                                           </p:stCondLst>
                                         </p:cTn>
                                         <p:tgtEl>
-                                          <p:spTgt spid="32"/>
+                                          <p:spTgt spid="33"/>
                                         </p:tgtEl>
                                         <p:attrNameLst>
                                           <p:attrName>style.visibility</p:attrName>
@@ -24041,7 +24441,7 @@
                                           </p:stCondLst>
                                         </p:cTn>
                                         <p:tgtEl>
-                                          <p:spTgt spid="33"/>
+                                          <p:spTgt spid="34"/>
                                         </p:tgtEl>
                                         <p:attrNameLst>
                                           <p:attrName>style.visibility</p:attrName>
@@ -24082,12 +24482,12 @@
       </p:par>
     </p:tnLst>
     <p:bldLst>
-      <p:bldP spid="8" grpId="0" animBg="1"/>
-      <p:bldP spid="13" grpId="0" animBg="1"/>
-      <p:bldP spid="18" grpId="0" animBg="1"/>
-      <p:bldP spid="23" grpId="0" animBg="1"/>
-      <p:bldP spid="28" grpId="0" animBg="1"/>
-      <p:bldP spid="33" grpId="0" animBg="1"/>
+      <p:bldP spid="9" grpId="0" animBg="1"/>
+      <p:bldP spid="14" grpId="0" animBg="1"/>
+      <p:bldP spid="19" grpId="0" animBg="1"/>
+      <p:bldP spid="24" grpId="0" animBg="1"/>
+      <p:bldP spid="29" grpId="0" animBg="1"/>
+      <p:bldP spid="34" grpId="0" animBg="1"/>
     </p:bldLst>
   </p:timing>
 </p:sld>
@@ -24300,7 +24700,7 @@
       </p:sp>
       <p:pic>
         <p:nvPicPr>
-          <p:cNvPr id="4" name="dibujo_0" descr="C:\Users\Chingu\AppData\Local\Temp\claude\C--Users-Chingu-Desktop-ACADEMIASEULWEB\d4111e1b-5523-44ea-97b2-b1a1d9545b9e\scratchpad\decks\cache\ec9c84.png"/>
+          <p:cNvPr id="4" name="dibujo_0" descr="C:\Users\Chingu\AppData\Local\Temp\claude\C--Users-Chingu-Desktop-ACADEMIASEULWEB\d4111e1b-5523-44ea-97b2-b1a1d9545b9e\scratchpad\decks\cache\img_14d5a418a639b10e.png"/>
           <p:cNvPicPr>
             <a:picLocks noChangeAspect="1"/>
           </p:cNvPicPr>
@@ -24314,8 +24714,8 @@
         </p:blipFill>
         <p:spPr>
           <a:xfrm>
-            <a:off x="1836191" y="1435608"/>
-            <a:ext cx="969721" cy="969721"/>
+            <a:off x="1766926" y="1435608"/>
+            <a:ext cx="1108253" cy="1108253"/>
           </a:xfrm>
           <a:prstGeom prst="rect">
             <a:avLst/>
@@ -24330,8 +24730,8 @@
         </p:nvSpPr>
         <p:spPr>
           <a:xfrm>
-            <a:off x="548640" y="2423617"/>
-            <a:ext cx="3544824" cy="507949"/>
+            <a:off x="548640" y="2562149"/>
+            <a:ext cx="3544824" cy="461772"/>
           </a:xfrm>
           <a:prstGeom prst="rect">
             <a:avLst/>
@@ -24349,7 +24749,7 @@
               <a:buNone/>
             </a:pPr>
             <a:r>
-              <a:rPr lang="ko-KR" altLang="en-US" sz="3100" b="1" dirty="0">
+              <a:rPr lang="ko-KR" altLang="en-US" sz="2900" b="1" dirty="0">
                 <a:solidFill>
                   <a:srgbClr val="4236F6"/>
                 </a:solidFill>
@@ -24359,7 +24759,7 @@
               </a:rPr>
               <a:t>위</a:t>
             </a:r>
-            <a:endParaRPr lang="en-US" sz="3100" dirty="0"/>
+            <a:endParaRPr lang="en-US" sz="2900" dirty="0"/>
           </a:p>
         </p:txBody>
       </p:sp>
@@ -24371,8 +24771,8 @@
         </p:nvSpPr>
         <p:spPr>
           <a:xfrm>
-            <a:off x="621792" y="2931566"/>
-            <a:ext cx="3398520" cy="291694"/>
+            <a:off x="621792" y="3023921"/>
+            <a:ext cx="3398520" cy="537667"/>
           </a:xfrm>
           <a:prstGeom prst="rect">
             <a:avLst/>
@@ -24426,8 +24826,8 @@
         </p:blipFill>
         <p:spPr>
           <a:xfrm>
-            <a:off x="3654552" y="3214116"/>
-            <a:ext cx="329184" cy="329184"/>
+            <a:off x="3691128" y="1399032"/>
+            <a:ext cx="310896" cy="310896"/>
           </a:xfrm>
           <a:prstGeom prst="rect">
             <a:avLst/>
@@ -24470,7 +24870,7 @@
       </p:sp>
       <p:pic>
         <p:nvPicPr>
-          <p:cNvPr id="9" name="dibujo_1" descr="C:\Users\Chingu\AppData\Local\Temp\claude\C--Users-Chingu-Desktop-ACADEMIASEULWEB\d4111e1b-5523-44ea-97b2-b1a1d9545b9e\scratchpad\decks\cache\ec9584eb9e98.png"/>
+          <p:cNvPr id="9" name="dibujo_1" descr="C:\Users\Chingu\AppData\Local\Temp\claude\C--Users-Chingu-Desktop-ACADEMIASEULWEB\d4111e1b-5523-44ea-97b2-b1a1d9545b9e\scratchpad\decks\cache\img_90149f94431dfea3.png"/>
           <p:cNvPicPr>
             <a:picLocks noChangeAspect="1"/>
           </p:cNvPicPr>
@@ -24484,8 +24884,8 @@
         </p:blipFill>
         <p:spPr>
           <a:xfrm>
-            <a:off x="5609615" y="1435608"/>
-            <a:ext cx="969721" cy="969721"/>
+            <a:off x="5540350" y="1435608"/>
+            <a:ext cx="1108253" cy="1108253"/>
           </a:xfrm>
           <a:prstGeom prst="rect">
             <a:avLst/>
@@ -24500,8 +24900,8 @@
         </p:nvSpPr>
         <p:spPr>
           <a:xfrm>
-            <a:off x="4322064" y="2423617"/>
-            <a:ext cx="3544824" cy="507949"/>
+            <a:off x="4322064" y="2562149"/>
+            <a:ext cx="3544824" cy="461772"/>
           </a:xfrm>
           <a:prstGeom prst="rect">
             <a:avLst/>
@@ -24519,7 +24919,7 @@
               <a:buNone/>
             </a:pPr>
             <a:r>
-              <a:rPr lang="ko-KR" altLang="en-US" sz="3100" b="1" dirty="0">
+              <a:rPr lang="ko-KR" altLang="en-US" sz="2900" b="1" dirty="0">
                 <a:solidFill>
                   <a:srgbClr val="4236F6"/>
                 </a:solidFill>
@@ -24529,7 +24929,7 @@
               </a:rPr>
               <a:t>아래</a:t>
             </a:r>
-            <a:endParaRPr lang="en-US" sz="3100" dirty="0"/>
+            <a:endParaRPr lang="en-US" sz="2900" dirty="0"/>
           </a:p>
         </p:txBody>
       </p:sp>
@@ -24541,8 +24941,8 @@
         </p:nvSpPr>
         <p:spPr>
           <a:xfrm>
-            <a:off x="4395216" y="2931566"/>
-            <a:ext cx="3398520" cy="291694"/>
+            <a:off x="4395216" y="3023921"/>
+            <a:ext cx="3398520" cy="537667"/>
           </a:xfrm>
           <a:prstGeom prst="rect">
             <a:avLst/>
@@ -24596,8 +24996,8 @@
         </p:blipFill>
         <p:spPr>
           <a:xfrm>
-            <a:off x="7427976" y="3214116"/>
-            <a:ext cx="329184" cy="329184"/>
+            <a:off x="7464552" y="1399032"/>
+            <a:ext cx="310896" cy="310896"/>
           </a:xfrm>
           <a:prstGeom prst="rect">
             <a:avLst/>
@@ -24640,7 +25040,7 @@
       </p:sp>
       <p:pic>
         <p:nvPicPr>
-          <p:cNvPr id="14" name="dibujo_2" descr="C:\Users\Chingu\AppData\Local\Temp\claude\C--Users-Chingu-Desktop-ACADEMIASEULWEB\d4111e1b-5523-44ea-97b2-b1a1d9545b9e\scratchpad\decks\cache\ec959e.png"/>
+          <p:cNvPr id="14" name="dibujo_2" descr="C:\Users\Chingu\AppData\Local\Temp\claude\C--Users-Chingu-Desktop-ACADEMIASEULWEB\d4111e1b-5523-44ea-97b2-b1a1d9545b9e\scratchpad\decks\cache\img_ee758e7c02eb2c1a.png"/>
           <p:cNvPicPr>
             <a:picLocks noChangeAspect="1"/>
           </p:cNvPicPr>
@@ -24654,8 +25054,8 @@
         </p:blipFill>
         <p:spPr>
           <a:xfrm>
-            <a:off x="9383039" y="1435608"/>
-            <a:ext cx="969721" cy="969721"/>
+            <a:off x="9313774" y="1435608"/>
+            <a:ext cx="1108253" cy="1108253"/>
           </a:xfrm>
           <a:prstGeom prst="rect">
             <a:avLst/>
@@ -24670,8 +25070,8 @@
         </p:nvSpPr>
         <p:spPr>
           <a:xfrm>
-            <a:off x="8095488" y="2423617"/>
-            <a:ext cx="3544824" cy="507949"/>
+            <a:off x="8095488" y="2562149"/>
+            <a:ext cx="3544824" cy="461772"/>
           </a:xfrm>
           <a:prstGeom prst="rect">
             <a:avLst/>
@@ -24689,7 +25089,7 @@
               <a:buNone/>
             </a:pPr>
             <a:r>
-              <a:rPr lang="ko-KR" altLang="en-US" sz="3100" b="1" dirty="0">
+              <a:rPr lang="ko-KR" altLang="en-US" sz="2900" b="1" dirty="0">
                 <a:solidFill>
                   <a:srgbClr val="4236F6"/>
                 </a:solidFill>
@@ -24699,7 +25099,7 @@
               </a:rPr>
               <a:t>앞</a:t>
             </a:r>
-            <a:endParaRPr lang="en-US" sz="3100" dirty="0"/>
+            <a:endParaRPr lang="en-US" sz="2900" dirty="0"/>
           </a:p>
         </p:txBody>
       </p:sp>
@@ -24711,7 +25111,7 @@
         </p:nvSpPr>
         <p:spPr>
           <a:xfrm>
-            <a:off x="8095488" y="2931566"/>
+            <a:off x="8095488" y="3023921"/>
             <a:ext cx="3544824" cy="274320"/>
           </a:xfrm>
           <a:prstGeom prst="rect">
@@ -24779,7 +25179,7 @@
         </p:nvSpPr>
         <p:spPr>
           <a:xfrm>
-            <a:off x="8168640" y="3205886"/>
+            <a:off x="8168640" y="3298241"/>
             <a:ext cx="3398520" cy="274320"/>
           </a:xfrm>
           <a:prstGeom prst="rect">
@@ -24834,8 +25234,8 @@
         </p:blipFill>
         <p:spPr>
           <a:xfrm>
-            <a:off x="11201400" y="3214116"/>
-            <a:ext cx="329184" cy="329184"/>
+            <a:off x="11237976" y="1399032"/>
+            <a:ext cx="310896" cy="310896"/>
           </a:xfrm>
           <a:prstGeom prst="rect">
             <a:avLst/>
@@ -24878,7 +25278,7 @@
       </p:sp>
       <p:pic>
         <p:nvPicPr>
-          <p:cNvPr id="20" name="dibujo_3" descr="C:\Users\Chingu\AppData\Local\Temp\claude\C--Users-Chingu-Desktop-ACADEMIASEULWEB\d4111e1b-5523-44ea-97b2-b1a1d9545b9e\scratchpad\decks\cache\eb92a4.png"/>
+          <p:cNvPr id="20" name="dibujo_3" descr="C:\Users\Chingu\AppData\Local\Temp\claude\C--Users-Chingu-Desktop-ACADEMIASEULWEB\d4111e1b-5523-44ea-97b2-b1a1d9545b9e\scratchpad\decks\cache\img_f13a4ca604c498af.png"/>
           <p:cNvPicPr>
             <a:picLocks noChangeAspect="1"/>
           </p:cNvPicPr>
@@ -24892,8 +25292,8 @@
         </p:blipFill>
         <p:spPr>
           <a:xfrm>
-            <a:off x="1836191" y="3973068"/>
-            <a:ext cx="969721" cy="969721"/>
+            <a:off x="1766926" y="3973068"/>
+            <a:ext cx="1108253" cy="1108253"/>
           </a:xfrm>
           <a:prstGeom prst="rect">
             <a:avLst/>
@@ -24908,8 +25308,8 @@
         </p:nvSpPr>
         <p:spPr>
           <a:xfrm>
-            <a:off x="548640" y="4961077"/>
-            <a:ext cx="3544824" cy="507949"/>
+            <a:off x="548640" y="5099609"/>
+            <a:ext cx="3544824" cy="461772"/>
           </a:xfrm>
           <a:prstGeom prst="rect">
             <a:avLst/>
@@ -24927,7 +25327,7 @@
               <a:buNone/>
             </a:pPr>
             <a:r>
-              <a:rPr lang="ko-KR" altLang="en-US" sz="3100" b="1" dirty="0">
+              <a:rPr lang="ko-KR" altLang="en-US" sz="2900" b="1" dirty="0">
                 <a:solidFill>
                   <a:srgbClr val="4236F6"/>
                 </a:solidFill>
@@ -24937,7 +25337,7 @@
               </a:rPr>
               <a:t>뒤</a:t>
             </a:r>
-            <a:endParaRPr lang="en-US" sz="3100" dirty="0"/>
+            <a:endParaRPr lang="en-US" sz="2900" dirty="0"/>
           </a:p>
         </p:txBody>
       </p:sp>
@@ -24949,8 +25349,8 @@
         </p:nvSpPr>
         <p:spPr>
           <a:xfrm>
-            <a:off x="621792" y="5469026"/>
-            <a:ext cx="3398520" cy="291694"/>
+            <a:off x="621792" y="5561381"/>
+            <a:ext cx="3398520" cy="537667"/>
           </a:xfrm>
           <a:prstGeom prst="rect">
             <a:avLst/>
@@ -25004,8 +25404,8 @@
         </p:blipFill>
         <p:spPr>
           <a:xfrm>
-            <a:off x="3654552" y="5751576"/>
-            <a:ext cx="329184" cy="329184"/>
+            <a:off x="3691128" y="3936492"/>
+            <a:ext cx="310896" cy="310896"/>
           </a:xfrm>
           <a:prstGeom prst="rect">
             <a:avLst/>
@@ -25048,7 +25448,7 @@
       </p:sp>
       <p:pic>
         <p:nvPicPr>
-          <p:cNvPr id="25" name="dibujo_4" descr="C:\Users\Chingu\AppData\Local\Temp\claude\C--Users-Chingu-Desktop-ACADEMIASEULWEB\d4111e1b-5523-44ea-97b2-b1a1d9545b9e\scratchpad\decks\cache\ec9886.png"/>
+          <p:cNvPr id="25" name="dibujo_4" descr="C:\Users\Chingu\AppData\Local\Temp\claude\C--Users-Chingu-Desktop-ACADEMIASEULWEB\d4111e1b-5523-44ea-97b2-b1a1d9545b9e\scratchpad\decks\cache\img_6b865faecca06d38.png"/>
           <p:cNvPicPr>
             <a:picLocks noChangeAspect="1"/>
           </p:cNvPicPr>
@@ -25062,8 +25462,8 @@
         </p:blipFill>
         <p:spPr>
           <a:xfrm>
-            <a:off x="5609615" y="3973068"/>
-            <a:ext cx="969721" cy="969721"/>
+            <a:off x="5540350" y="3973068"/>
+            <a:ext cx="1108253" cy="1108253"/>
           </a:xfrm>
           <a:prstGeom prst="rect">
             <a:avLst/>
@@ -25078,8 +25478,8 @@
         </p:nvSpPr>
         <p:spPr>
           <a:xfrm>
-            <a:off x="4322064" y="4961077"/>
-            <a:ext cx="3544824" cy="507949"/>
+            <a:off x="4322064" y="5099609"/>
+            <a:ext cx="3544824" cy="461772"/>
           </a:xfrm>
           <a:prstGeom prst="rect">
             <a:avLst/>
@@ -25097,7 +25497,7 @@
               <a:buNone/>
             </a:pPr>
             <a:r>
-              <a:rPr lang="ko-KR" altLang="en-US" sz="3100" b="1" dirty="0">
+              <a:rPr lang="ko-KR" altLang="en-US" sz="2900" b="1" dirty="0">
                 <a:solidFill>
                   <a:srgbClr val="4236F6"/>
                 </a:solidFill>
@@ -25107,7 +25507,7 @@
               </a:rPr>
               <a:t>옆</a:t>
             </a:r>
-            <a:endParaRPr lang="en-US" sz="3100" dirty="0"/>
+            <a:endParaRPr lang="en-US" sz="2900" dirty="0"/>
           </a:p>
         </p:txBody>
       </p:sp>
@@ -25119,7 +25519,7 @@
         </p:nvSpPr>
         <p:spPr>
           <a:xfrm>
-            <a:off x="4322064" y="5469026"/>
+            <a:off x="4322064" y="5561381"/>
             <a:ext cx="3544824" cy="274320"/>
           </a:xfrm>
           <a:prstGeom prst="rect">
@@ -25187,7 +25587,7 @@
         </p:nvSpPr>
         <p:spPr>
           <a:xfrm>
-            <a:off x="4395216" y="5743346"/>
+            <a:off x="4395216" y="5835701"/>
             <a:ext cx="3398520" cy="274320"/>
           </a:xfrm>
           <a:prstGeom prst="rect">
@@ -25242,8 +25642,8 @@
         </p:blipFill>
         <p:spPr>
           <a:xfrm>
-            <a:off x="7427976" y="5751576"/>
-            <a:ext cx="329184" cy="329184"/>
+            <a:off x="7464552" y="3936492"/>
+            <a:ext cx="310896" cy="310896"/>
           </a:xfrm>
           <a:prstGeom prst="rect">
             <a:avLst/>
@@ -25286,7 +25686,7 @@
       </p:sp>
       <p:pic>
         <p:nvPicPr>
-          <p:cNvPr id="31" name="dibujo_5" descr="C:\Users\Chingu\AppData\Local\Temp\claude\C--Users-Chingu-Desktop-ACADEMIASEULWEB\d4111e1b-5523-44ea-97b2-b1a1d9545b9e\scratchpad\decks\cache\ec9588.png"/>
+          <p:cNvPr id="31" name="dibujo_5" descr="C:\Users\Chingu\AppData\Local\Temp\claude\C--Users-Chingu-Desktop-ACADEMIASEULWEB\d4111e1b-5523-44ea-97b2-b1a1d9545b9e\scratchpad\decks\cache\img_60e1b9d214478d04.png"/>
           <p:cNvPicPr>
             <a:picLocks noChangeAspect="1"/>
           </p:cNvPicPr>
@@ -25300,8 +25700,8 @@
         </p:blipFill>
         <p:spPr>
           <a:xfrm>
-            <a:off x="9383039" y="3973068"/>
-            <a:ext cx="969721" cy="969721"/>
+            <a:off x="9313774" y="3973068"/>
+            <a:ext cx="1108253" cy="1108253"/>
           </a:xfrm>
           <a:prstGeom prst="rect">
             <a:avLst/>
@@ -25316,8 +25716,8 @@
         </p:nvSpPr>
         <p:spPr>
           <a:xfrm>
-            <a:off x="8095488" y="4961077"/>
-            <a:ext cx="3544824" cy="507949"/>
+            <a:off x="8095488" y="5099609"/>
+            <a:ext cx="3544824" cy="461772"/>
           </a:xfrm>
           <a:prstGeom prst="rect">
             <a:avLst/>
@@ -25335,7 +25735,7 @@
               <a:buNone/>
             </a:pPr>
             <a:r>
-              <a:rPr lang="ko-KR" altLang="en-US" sz="3100" b="1" dirty="0">
+              <a:rPr lang="ko-KR" altLang="en-US" sz="2900" b="1" dirty="0">
                 <a:solidFill>
                   <a:srgbClr val="4236F6"/>
                 </a:solidFill>
@@ -25345,7 +25745,7 @@
               </a:rPr>
               <a:t>안</a:t>
             </a:r>
-            <a:endParaRPr lang="en-US" sz="3100" dirty="0"/>
+            <a:endParaRPr lang="en-US" sz="2900" dirty="0"/>
           </a:p>
         </p:txBody>
       </p:sp>
@@ -25357,7 +25757,7 @@
         </p:nvSpPr>
         <p:spPr>
           <a:xfrm>
-            <a:off x="8095488" y="5469026"/>
+            <a:off x="8095488" y="5561381"/>
             <a:ext cx="3544824" cy="274320"/>
           </a:xfrm>
           <a:prstGeom prst="rect">
@@ -25425,7 +25825,7 @@
         </p:nvSpPr>
         <p:spPr>
           <a:xfrm>
-            <a:off x="8168640" y="5743346"/>
+            <a:off x="8168640" y="5835701"/>
             <a:ext cx="3398520" cy="274320"/>
           </a:xfrm>
           <a:prstGeom prst="rect">
@@ -25480,8 +25880,8 @@
         </p:blipFill>
         <p:spPr>
           <a:xfrm>
-            <a:off x="11201400" y="5751576"/>
-            <a:ext cx="329184" cy="329184"/>
+            <a:off x="11237976" y="3936492"/>
+            <a:ext cx="310896" cy="310896"/>
           </a:xfrm>
           <a:prstGeom prst="rect">
             <a:avLst/>

--- a/Curriculo/Fase2_Basico1/decks/Basico1_S05_Kiran.pptx
+++ b/Curriculo/Fase2_Basico1/decks/Basico1_S05_Kiran.pptx
@@ -132,7 +132,7 @@
   <p:extLst>
     <p:ext uri="{521415D9-36F7-43E2-AB2F-B90AF26B5E84}">
       <p14:sectionLst xmlns:p14="http://schemas.microsoft.com/office/powerpoint/2010/main">
-        <p14:section name="Semana 5" id="{AEA43AF2-ED43-3733-1303-DC6C3E99ADF6}">
+        <p14:section name="Semana 5" id="{3651D5E2-0F59-022E-10CB-42A00273D6A7}">
           <p14:sldIdLst>
             <p14:sldId id="256"/>
             <p14:sldId id="257"/>
@@ -196,7 +196,7 @@
     </p:spTree>
     <p:extLst>
       <p:ext uri="{BB962C8B-B14F-4D97-AF65-F5344CB8AC3E}">
-        <p14:creationId xmlns:p14="http://schemas.microsoft.com/office/powerpoint/2010/main" val="3890591662"/>
+        <p14:creationId xmlns:p14="http://schemas.microsoft.com/office/powerpoint/2010/main" val="2951432090"/>
       </p:ext>
     </p:extLst>
   </p:cSld>
@@ -342,7 +342,7 @@
           <a:p>
             <a:r>
               <a:rPr lang="en-US" dirty="0"/>
-              <a:t>20:00–20:01 (1 min). Graba desde el minuto 0 (Basico1-Martes_S05_2026-11-10 / Basico1-Jueves_S05_2026-11-12). Saluda: 안녕하세요, 여러분! Una línea sobre el comentario de mitad de curso (si ya llegó; si no, di cuándo llega). Anuncia: 'Hoy aprendemos la frase más útil de cualquier viaje; al final la van a decir sin pensar: 화장실이 어디예요?'
+              <a:t>20:00–20:01 (1 min). Graba desde el minuto 0 (Basico1-Martes_S05_2026-11-17 / Basico1-Jueves_S05_2026-11-19). Saluda: 안녕하세요, 여러분! Una línea sobre el comentario de mitad de curso (si ya llegó; si no, di cuándo llega). Anuncia: 'Hoy aprendemos la frase más útil de cualquier viaje; al final la van a decir sin pensar: 화장실이 어디예요?'
 Fuente: A1_Nivel_1/06_Ubicacion/Sesion_06_Ubicacion.pptx lám. 1 (adaptada: Kiran en vez de Jay, sin romanización)
 Lámina 1</a:t>
             </a:r>
@@ -3695,7 +3695,7 @@
                   <a:srgbClr val="E8B84B"/>
                 </a:solidFill>
               </a:rPr>
-              <a:t>) · mar 10 / jue 12 nov · 20:00 (Chile)</a:t>
+              <a:t>) · mar 17 / jue 19 nov · 20:00 (Chile)</a:t>
             </a:r>
             <a:endParaRPr lang="en-US" sz="2200" dirty="0"/>
           </a:p>
@@ -3857,7 +3857,7 @@
           <p:nvPr>
             <p:extLst>
               <p:ext uri="{D42A27DB-BD31-4B8C-83A1-F6EECF244321}">
-                <p14:modId xmlns:p14="http://schemas.microsoft.com/office/powerpoint/2010/main" val="726321474"/>
+                <p14:modId xmlns:p14="http://schemas.microsoft.com/office/powerpoint/2010/main" val="1826835420"/>
               </p:ext>
             </p:extLst>
           </p:nvPr>
@@ -14147,7 +14147,7 @@
           <p:nvPr>
             <p:extLst>
               <p:ext uri="{D42A27DB-BD31-4B8C-83A1-F6EECF244321}">
-                <p14:modId xmlns:p14="http://schemas.microsoft.com/office/powerpoint/2010/main" val="826899986"/>
+                <p14:modId xmlns:p14="http://schemas.microsoft.com/office/powerpoint/2010/main" val="2073423134"/>
               </p:ext>
             </p:extLst>
           </p:nvPr>
@@ -16105,7 +16105,7 @@
           <p:nvPr>
             <p:extLst>
               <p:ext uri="{D42A27DB-BD31-4B8C-83A1-F6EECF244321}">
-                <p14:modId xmlns:p14="http://schemas.microsoft.com/office/powerpoint/2010/main" val="3037395100"/>
+                <p14:modId xmlns:p14="http://schemas.microsoft.com/office/powerpoint/2010/main" val="3843424953"/>
               </p:ext>
             </p:extLst>
           </p:nvPr>
@@ -17044,7 +17044,7 @@
                   <a:srgbClr val="14142B"/>
                 </a:solidFill>
               </a:rPr>
-              <a:t>Entrega: antes del mar 17 / jue 19 nov, 20:00 (Chile), en el grupo</a:t>
+              <a:t>Entrega: antes del mar 24 / jue 26 nov, 20:00 (Chile), en el grupo</a:t>
             </a:r>
             <a:endParaRPr lang="en-US" sz="1800" dirty="0"/>
           </a:p>
@@ -18926,7 +18926,7 @@
           <p:nvPr>
             <p:extLst>
               <p:ext uri="{D42A27DB-BD31-4B8C-83A1-F6EECF244321}">
-                <p14:modId xmlns:p14="http://schemas.microsoft.com/office/powerpoint/2010/main" val="1586659074"/>
+                <p14:modId xmlns:p14="http://schemas.microsoft.com/office/powerpoint/2010/main" val="2912074700"/>
               </p:ext>
             </p:extLst>
           </p:nvPr>
@@ -20544,7 +20544,7 @@
         </p:nvSpPr>
         <p:spPr>
           <a:xfrm>
-            <a:off x="548640" y="3863340"/>
+            <a:off x="2435352" y="3863340"/>
             <a:ext cx="3544824" cy="2308860"/>
           </a:xfrm>
           <a:prstGeom prst="roundRect">
@@ -20586,7 +20586,7 @@
         </p:blipFill>
         <p:spPr>
           <a:xfrm>
-            <a:off x="1766926" y="3973068"/>
+            <a:off x="3653638" y="3973068"/>
             <a:ext cx="1108253" cy="1108253"/>
           </a:xfrm>
           <a:prstGeom prst="rect">
@@ -20602,7 +20602,7 @@
         </p:nvSpPr>
         <p:spPr>
           <a:xfrm>
-            <a:off x="548640" y="5099609"/>
+            <a:off x="2435352" y="5099609"/>
             <a:ext cx="3544824" cy="461772"/>
           </a:xfrm>
           <a:prstGeom prst="rect">
@@ -20643,7 +20643,7 @@
         </p:nvSpPr>
         <p:spPr>
           <a:xfrm>
-            <a:off x="621792" y="5561381"/>
+            <a:off x="2508504" y="5561381"/>
             <a:ext cx="3398520" cy="537667"/>
           </a:xfrm>
           <a:prstGeom prst="rect">
@@ -20698,7 +20698,7 @@
         </p:blipFill>
         <p:spPr>
           <a:xfrm>
-            <a:off x="3691128" y="3936492"/>
+            <a:off x="5577840" y="3936492"/>
             <a:ext cx="310896" cy="310896"/>
           </a:xfrm>
           <a:prstGeom prst="rect">
@@ -20714,7 +20714,7 @@
         </p:nvSpPr>
         <p:spPr>
           <a:xfrm>
-            <a:off x="4322064" y="3863340"/>
+            <a:off x="6208776" y="3863340"/>
             <a:ext cx="3544824" cy="2308860"/>
           </a:xfrm>
           <a:prstGeom prst="roundRect">
@@ -20756,7 +20756,7 @@
         </p:blipFill>
         <p:spPr>
           <a:xfrm>
-            <a:off x="5540350" y="3973068"/>
+            <a:off x="7427062" y="3973068"/>
             <a:ext cx="1108253" cy="1108253"/>
           </a:xfrm>
           <a:prstGeom prst="rect">
@@ -20772,7 +20772,7 @@
         </p:nvSpPr>
         <p:spPr>
           <a:xfrm>
-            <a:off x="4322064" y="5099609"/>
+            <a:off x="6208776" y="5099609"/>
             <a:ext cx="3544824" cy="461772"/>
           </a:xfrm>
           <a:prstGeom prst="rect">
@@ -20813,7 +20813,7 @@
         </p:nvSpPr>
         <p:spPr>
           <a:xfrm>
-            <a:off x="4395216" y="5561381"/>
+            <a:off x="6281928" y="5561381"/>
             <a:ext cx="3398520" cy="537667"/>
           </a:xfrm>
           <a:prstGeom prst="rect">
@@ -20868,7 +20868,7 @@
         </p:blipFill>
         <p:spPr>
           <a:xfrm>
-            <a:off x="7464552" y="3936492"/>
+            <a:off x="9351264" y="3936492"/>
             <a:ext cx="310896" cy="310896"/>
           </a:xfrm>
           <a:prstGeom prst="rect">
